--- a/presentations/gestalt-theory-counselling/Gestalt Theory and Its Application to Counselling.pptx
+++ b/presentations/gestalt-theory-counselling/Gestalt Theory and Its Application to Counselling.pptx
@@ -3191,12 +3191,12 @@
           <a:p>
             <a:pPr algn="l">
               <a:lnSpc>
-                <a:spcPts val="1660"/>
+                <a:spcPts val="1730"/>
               </a:lnSpc>
               <a:buNone/>
             </a:pPr>
             <a:r>
-              <a:rPr sz="1000" b="1" i="0" spc="281">
+              <a:rPr sz="1050" b="1" i="0" spc="281">
                 <a:solidFill>
                   <a:srgbClr val="CFE9F8"/>
                 </a:solidFill>
@@ -3215,7 +3215,7 @@
         </p:nvSpPr>
         <p:spPr>
           <a:xfrm>
-            <a:off x="792478" y="895998"/>
+            <a:off x="792478" y="905826"/>
             <a:ext cx="8705066" cy="228599"/>
           </a:xfrm>
           <a:prstGeom prst="rect">
@@ -3253,7 +3253,7 @@
         </p:nvSpPr>
         <p:spPr>
           <a:xfrm>
-            <a:off x="792478" y="1792870"/>
+            <a:off x="792478" y="1802698"/>
             <a:ext cx="8705066" cy="228599"/>
           </a:xfrm>
           <a:prstGeom prst="rect">
@@ -3291,7 +3291,7 @@
         </p:nvSpPr>
         <p:spPr>
           <a:xfrm>
-            <a:off x="792478" y="2781181"/>
+            <a:off x="792478" y="2791009"/>
             <a:ext cx="7927828" cy="228599"/>
           </a:xfrm>
           <a:prstGeom prst="rect">
@@ -3337,7 +3337,7 @@
         </p:blipFill>
         <p:spPr>
           <a:xfrm>
-            <a:off x="792478" y="3274568"/>
+            <a:off x="792478" y="3284395"/>
             <a:ext cx="297179" cy="297179"/>
           </a:xfrm>
           <a:prstGeom prst="rect">
@@ -3353,7 +3353,7 @@
         </p:nvSpPr>
         <p:spPr>
           <a:xfrm>
-            <a:off x="1173477" y="3343147"/>
+            <a:off x="1173477" y="3352975"/>
             <a:ext cx="3886190" cy="228599"/>
           </a:xfrm>
           <a:prstGeom prst="rect">
@@ -3367,12 +3367,12 @@
           <a:p>
             <a:pPr algn="l">
               <a:lnSpc>
-                <a:spcPts val="1450"/>
+                <a:spcPts val="1730"/>
               </a:lnSpc>
               <a:buNone/>
             </a:pPr>
             <a:r>
-              <a:rPr sz="900" b="1" i="0" spc="203">
+              <a:rPr sz="1050" b="1" i="0" spc="203">
                 <a:solidFill>
                   <a:srgbClr val="B7D6E9"/>
                 </a:solidFill>
@@ -3399,7 +3399,7 @@
         </p:blipFill>
         <p:spPr>
           <a:xfrm>
-            <a:off x="792478" y="3647947"/>
+            <a:off x="792478" y="3657774"/>
             <a:ext cx="247649" cy="247649"/>
           </a:xfrm>
           <a:prstGeom prst="rect">
@@ -3415,7 +3415,7 @@
         </p:nvSpPr>
         <p:spPr>
           <a:xfrm>
-            <a:off x="1127757" y="3609847"/>
+            <a:off x="1127757" y="3619674"/>
             <a:ext cx="3342124" cy="228599"/>
           </a:xfrm>
           <a:prstGeom prst="rect">
@@ -3453,7 +3453,7 @@
         </p:nvSpPr>
         <p:spPr>
           <a:xfrm>
-            <a:off x="4282429" y="3632707"/>
+            <a:off x="4282429" y="3642534"/>
             <a:ext cx="2331714" cy="228599"/>
           </a:xfrm>
           <a:prstGeom prst="rect">
@@ -3467,12 +3467,12 @@
           <a:p>
             <a:pPr algn="l">
               <a:lnSpc>
-                <a:spcPts val="1520"/>
+                <a:spcPts val="1730"/>
               </a:lnSpc>
               <a:buNone/>
             </a:pPr>
             <a:r>
-              <a:rPr sz="900" b="0" i="0">
+              <a:rPr sz="1050" b="0" i="0">
                 <a:solidFill>
                   <a:srgbClr val="D8EBF7"/>
                 </a:solidFill>
@@ -3499,7 +3499,7 @@
         </p:blipFill>
         <p:spPr>
           <a:xfrm>
-            <a:off x="792478" y="3937506"/>
+            <a:off x="792478" y="3947334"/>
             <a:ext cx="247649" cy="247649"/>
           </a:xfrm>
           <a:prstGeom prst="rect">
@@ -3515,7 +3515,7 @@
         </p:nvSpPr>
         <p:spPr>
           <a:xfrm>
-            <a:off x="1127757" y="3899406"/>
+            <a:off x="1127757" y="3909234"/>
             <a:ext cx="3342124" cy="228599"/>
           </a:xfrm>
           <a:prstGeom prst="rect">
@@ -3553,7 +3553,7 @@
         </p:nvSpPr>
         <p:spPr>
           <a:xfrm>
-            <a:off x="4282429" y="3922266"/>
+            <a:off x="4282429" y="3932094"/>
             <a:ext cx="2331714" cy="228599"/>
           </a:xfrm>
           <a:prstGeom prst="rect">
@@ -3567,12 +3567,12 @@
           <a:p>
             <a:pPr algn="l">
               <a:lnSpc>
-                <a:spcPts val="1520"/>
+                <a:spcPts val="1730"/>
               </a:lnSpc>
               <a:buNone/>
             </a:pPr>
             <a:r>
-              <a:rPr sz="900" b="0" i="0">
+              <a:rPr sz="1050" b="0" i="0">
                 <a:solidFill>
                   <a:srgbClr val="D8EBF7"/>
                 </a:solidFill>
@@ -3599,7 +3599,7 @@
         </p:blipFill>
         <p:spPr>
           <a:xfrm>
-            <a:off x="792478" y="4227065"/>
+            <a:off x="792478" y="4236893"/>
             <a:ext cx="247649" cy="247649"/>
           </a:xfrm>
           <a:prstGeom prst="rect">
@@ -3615,7 +3615,7 @@
         </p:nvSpPr>
         <p:spPr>
           <a:xfrm>
-            <a:off x="1127757" y="4188965"/>
+            <a:off x="1127757" y="4198793"/>
             <a:ext cx="3342124" cy="228599"/>
           </a:xfrm>
           <a:prstGeom prst="rect">
@@ -3653,7 +3653,7 @@
         </p:nvSpPr>
         <p:spPr>
           <a:xfrm>
-            <a:off x="4282429" y="4211825"/>
+            <a:off x="4282429" y="4221653"/>
             <a:ext cx="2331714" cy="228599"/>
           </a:xfrm>
           <a:prstGeom prst="rect">
@@ -3667,12 +3667,12 @@
           <a:p>
             <a:pPr algn="l">
               <a:lnSpc>
-                <a:spcPts val="1520"/>
+                <a:spcPts val="1730"/>
               </a:lnSpc>
               <a:buNone/>
             </a:pPr>
             <a:r>
-              <a:rPr sz="900" b="0" i="0">
+              <a:rPr sz="1050" b="0" i="0">
                 <a:solidFill>
                   <a:srgbClr val="D8EBF7"/>
                 </a:solidFill>
@@ -3705,12 +3705,12 @@
           <a:p>
             <a:pPr algn="l">
               <a:lnSpc>
-                <a:spcPts val="1450"/>
+                <a:spcPts val="1730"/>
               </a:lnSpc>
               <a:buNone/>
             </a:pPr>
             <a:r>
-              <a:rPr sz="900" b="1" i="0" spc="203">
+              <a:rPr sz="1050" b="1" i="0" spc="203">
                 <a:solidFill>
                   <a:srgbClr val="CFE9F8"/>
                 </a:solidFill>
@@ -3729,7 +3729,7 @@
         </p:nvSpPr>
         <p:spPr>
           <a:xfrm>
-            <a:off x="7619981" y="3506237"/>
+            <a:off x="7619981" y="3542339"/>
             <a:ext cx="3575295" cy="228599"/>
           </a:xfrm>
           <a:prstGeom prst="rect">
@@ -3767,7 +3767,7 @@
         </p:nvSpPr>
         <p:spPr>
           <a:xfrm>
-            <a:off x="7619981" y="4172151"/>
+            <a:off x="7619981" y="4208254"/>
             <a:ext cx="3575295" cy="228599"/>
           </a:xfrm>
           <a:prstGeom prst="rect">
@@ -3781,12 +3781,12 @@
           <a:p>
             <a:pPr algn="l">
               <a:lnSpc>
-                <a:spcPts val="1450"/>
+                <a:spcPts val="1730"/>
               </a:lnSpc>
               <a:buNone/>
             </a:pPr>
             <a:r>
-              <a:rPr sz="900" b="1" i="0" spc="203">
+              <a:rPr sz="1050" b="1" i="0" spc="203">
                 <a:solidFill>
                   <a:srgbClr val="CFE9F8"/>
                 </a:solidFill>
@@ -3805,7 +3805,7 @@
         </p:nvSpPr>
         <p:spPr>
           <a:xfrm>
-            <a:off x="7619981" y="4401796"/>
+            <a:off x="7619981" y="4474001"/>
             <a:ext cx="3575295" cy="228599"/>
           </a:xfrm>
           <a:prstGeom prst="rect">
@@ -3843,7 +3843,7 @@
         </p:nvSpPr>
         <p:spPr>
           <a:xfrm>
-            <a:off x="7619981" y="4826193"/>
+            <a:off x="7619981" y="4898398"/>
             <a:ext cx="3575295" cy="228599"/>
           </a:xfrm>
           <a:prstGeom prst="rect">
@@ -3857,12 +3857,12 @@
           <a:p>
             <a:pPr algn="l">
               <a:lnSpc>
-                <a:spcPts val="1450"/>
+                <a:spcPts val="1730"/>
               </a:lnSpc>
               <a:buNone/>
             </a:pPr>
             <a:r>
-              <a:rPr sz="900" b="1" i="0" spc="203">
+              <a:rPr sz="1050" b="1" i="0" spc="203">
                 <a:solidFill>
                   <a:srgbClr val="CFE9F8"/>
                 </a:solidFill>
@@ -3881,7 +3881,7 @@
         </p:nvSpPr>
         <p:spPr>
           <a:xfrm>
-            <a:off x="7619981" y="5055838"/>
+            <a:off x="7619981" y="5164146"/>
             <a:ext cx="3575295" cy="228599"/>
           </a:xfrm>
           <a:prstGeom prst="rect">
@@ -3933,12 +3933,12 @@
           <a:p>
             <a:pPr algn="l">
               <a:lnSpc>
-                <a:spcPts val="1450"/>
+                <a:spcPts val="1730"/>
               </a:lnSpc>
               <a:buNone/>
             </a:pPr>
             <a:r>
-              <a:rPr sz="900" b="0" i="0" spc="234">
+              <a:rPr sz="1050" b="0" i="0" spc="234">
                 <a:solidFill>
                   <a:srgbClr val="B7D6E9"/>
                 </a:solidFill>
@@ -5041,7 +5041,7 @@
               <a:t>10</a:t>
             </a:r>
             <a:r>
-              <a:rPr sz="900" b="1" i="0" spc="203">
+              <a:rPr sz="1050" b="1" i="0" spc="203">
                 <a:solidFill>
                   <a:srgbClr val="5F7E97"/>
                 </a:solidFill>
@@ -5060,7 +5060,7 @@
         </p:nvSpPr>
         <p:spPr>
           <a:xfrm>
-            <a:off x="792478" y="579119"/>
+            <a:off x="792478" y="563879"/>
             <a:ext cx="9870923" cy="228599"/>
           </a:xfrm>
           <a:prstGeom prst="rect">
@@ -5074,7 +5074,7 @@
           <a:p>
             <a:pPr algn="l">
               <a:lnSpc>
-                <a:spcPts val="7400"/>
+                <a:spcPts val="8030"/>
               </a:lnSpc>
               <a:buNone/>
             </a:pPr>
@@ -5098,7 +5098,7 @@
         </p:nvSpPr>
         <p:spPr>
           <a:xfrm>
-            <a:off x="792478" y="1625513"/>
+            <a:off x="792478" y="1706060"/>
             <a:ext cx="9171409" cy="228599"/>
           </a:xfrm>
           <a:prstGeom prst="rect">
@@ -5150,12 +5150,12 @@
           <a:p>
             <a:pPr algn="r">
               <a:lnSpc>
-                <a:spcPts val="1380"/>
+                <a:spcPts val="1730"/>
               </a:lnSpc>
               <a:buNone/>
             </a:pPr>
             <a:r>
-              <a:rPr sz="850" b="1" i="0" spc="109">
+              <a:rPr sz="1050" b="1" i="0" spc="109">
                 <a:solidFill>
                   <a:srgbClr val="8FA9BC"/>
                 </a:solidFill>
@@ -5188,12 +5188,12 @@
           <a:p>
             <a:pPr algn="r">
               <a:lnSpc>
-                <a:spcPts val="1660"/>
+                <a:spcPts val="1730"/>
               </a:lnSpc>
               <a:buNone/>
             </a:pPr>
             <a:r>
-              <a:rPr sz="1000" b="1" i="0" spc="156">
+              <a:rPr sz="1050" b="1" i="0" spc="156">
                 <a:solidFill>
                   <a:srgbClr val="8FA9BC"/>
                 </a:solidFill>
@@ -5212,7 +5212,7 @@
         </p:nvSpPr>
         <p:spPr>
           <a:xfrm>
-            <a:off x="792478" y="2156010"/>
+            <a:off x="792478" y="2285994"/>
             <a:ext cx="5907009" cy="228599"/>
           </a:xfrm>
           <a:prstGeom prst="rect">
@@ -5226,12 +5226,12 @@
           <a:p>
             <a:pPr algn="l">
               <a:lnSpc>
-                <a:spcPts val="1660"/>
+                <a:spcPts val="1730"/>
               </a:lnSpc>
               <a:buNone/>
             </a:pPr>
             <a:r>
-              <a:rPr sz="1000" b="1" i="0" spc="203">
+              <a:rPr sz="1050" b="1" i="0" spc="203">
                 <a:solidFill>
                   <a:srgbClr val="4595C2"/>
                 </a:solidFill>
@@ -5258,7 +5258,7 @@
         </p:blipFill>
         <p:spPr>
           <a:xfrm>
-            <a:off x="792478" y="2472890"/>
+            <a:off x="792478" y="2602875"/>
             <a:ext cx="227837" cy="227837"/>
           </a:xfrm>
           <a:prstGeom prst="rect">
@@ -5274,7 +5274,7 @@
         </p:nvSpPr>
         <p:spPr>
           <a:xfrm>
-            <a:off x="1187498" y="2430329"/>
+            <a:off x="1187498" y="2560314"/>
             <a:ext cx="1307004" cy="228599"/>
           </a:xfrm>
           <a:prstGeom prst="rect">
@@ -5320,7 +5320,7 @@
         </p:blipFill>
         <p:spPr>
           <a:xfrm>
-            <a:off x="2606033" y="2472890"/>
+            <a:off x="2606033" y="2602875"/>
             <a:ext cx="227837" cy="227837"/>
           </a:xfrm>
           <a:prstGeom prst="rect">
@@ -5336,7 +5336,7 @@
         </p:nvSpPr>
         <p:spPr>
           <a:xfrm>
-            <a:off x="3001053" y="2430329"/>
+            <a:off x="3001053" y="2560314"/>
             <a:ext cx="1307004" cy="228599"/>
           </a:xfrm>
           <a:prstGeom prst="rect">
@@ -5382,7 +5382,7 @@
         </p:blipFill>
         <p:spPr>
           <a:xfrm>
-            <a:off x="4419589" y="2472890"/>
+            <a:off x="4419589" y="2602875"/>
             <a:ext cx="227837" cy="227837"/>
           </a:xfrm>
           <a:prstGeom prst="rect">
@@ -5398,7 +5398,7 @@
         </p:nvSpPr>
         <p:spPr>
           <a:xfrm>
-            <a:off x="4814609" y="2430329"/>
+            <a:off x="4814609" y="2560314"/>
             <a:ext cx="1307004" cy="228599"/>
           </a:xfrm>
           <a:prstGeom prst="rect">
@@ -5444,7 +5444,7 @@
         </p:blipFill>
         <p:spPr>
           <a:xfrm>
-            <a:off x="6233144" y="2472890"/>
+            <a:off x="6233144" y="2602875"/>
             <a:ext cx="227837" cy="227837"/>
           </a:xfrm>
           <a:prstGeom prst="rect">
@@ -5460,7 +5460,7 @@
         </p:nvSpPr>
         <p:spPr>
           <a:xfrm>
-            <a:off x="6628164" y="2430329"/>
+            <a:off x="6628164" y="2560314"/>
             <a:ext cx="1307004" cy="228599"/>
           </a:xfrm>
           <a:prstGeom prst="rect">
@@ -5506,7 +5506,7 @@
         </p:blipFill>
         <p:spPr>
           <a:xfrm>
-            <a:off x="8046700" y="2472890"/>
+            <a:off x="8046700" y="2602875"/>
             <a:ext cx="227837" cy="227837"/>
           </a:xfrm>
           <a:prstGeom prst="rect">
@@ -5522,7 +5522,7 @@
         </p:nvSpPr>
         <p:spPr>
           <a:xfrm>
-            <a:off x="8441720" y="2430329"/>
+            <a:off x="8441720" y="2560314"/>
             <a:ext cx="1307004" cy="228599"/>
           </a:xfrm>
           <a:prstGeom prst="rect">
@@ -5568,7 +5568,7 @@
         </p:blipFill>
         <p:spPr>
           <a:xfrm>
-            <a:off x="792478" y="3079314"/>
+            <a:off x="792478" y="3209299"/>
             <a:ext cx="247649" cy="247649"/>
           </a:xfrm>
           <a:prstGeom prst="rect">
@@ -5584,7 +5584,7 @@
         </p:nvSpPr>
         <p:spPr>
           <a:xfrm>
-            <a:off x="1212187" y="3039928"/>
+            <a:off x="1212187" y="3169912"/>
             <a:ext cx="8898754" cy="228599"/>
           </a:xfrm>
           <a:prstGeom prst="rect">
@@ -5630,7 +5630,7 @@
         </p:blipFill>
         <p:spPr>
           <a:xfrm>
-            <a:off x="792478" y="4312687"/>
+            <a:off x="792478" y="4377679"/>
             <a:ext cx="247649" cy="247649"/>
           </a:xfrm>
           <a:prstGeom prst="rect">
@@ -5646,7 +5646,7 @@
         </p:nvSpPr>
         <p:spPr>
           <a:xfrm>
-            <a:off x="1212187" y="4273300"/>
+            <a:off x="1212187" y="4338292"/>
             <a:ext cx="8898754" cy="228599"/>
           </a:xfrm>
           <a:prstGeom prst="rect">
@@ -6778,7 +6778,7 @@
               <a:t>11</a:t>
             </a:r>
             <a:r>
-              <a:rPr sz="900" b="1" i="0" spc="203">
+              <a:rPr sz="1050" b="1" i="0" spc="203">
                 <a:solidFill>
                   <a:srgbClr val="5F7E97"/>
                 </a:solidFill>
@@ -6797,7 +6797,7 @@
         </p:nvSpPr>
         <p:spPr>
           <a:xfrm>
-            <a:off x="792478" y="579119"/>
+            <a:off x="792478" y="563879"/>
             <a:ext cx="9870923" cy="228599"/>
           </a:xfrm>
           <a:prstGeom prst="rect">
@@ -6811,12 +6811,12 @@
           <a:p>
             <a:pPr algn="l">
               <a:lnSpc>
-                <a:spcPts val="7400"/>
+                <a:spcPts val="7200"/>
               </a:lnSpc>
               <a:buNone/>
             </a:pPr>
             <a:r>
-              <a:rPr sz="5650" b="1" i="0">
+              <a:rPr sz="5050" b="1" i="0">
                 <a:solidFill>
                   <a:srgbClr val="4595C2"/>
                 </a:solidFill>
@@ -6835,7 +6835,7 @@
         </p:nvSpPr>
         <p:spPr>
           <a:xfrm>
-            <a:off x="792478" y="2565228"/>
+            <a:off x="792478" y="1600516"/>
             <a:ext cx="9171409" cy="228599"/>
           </a:xfrm>
           <a:prstGeom prst="rect">
@@ -6887,12 +6887,12 @@
           <a:p>
             <a:pPr algn="r">
               <a:lnSpc>
-                <a:spcPts val="1380"/>
+                <a:spcPts val="1730"/>
               </a:lnSpc>
               <a:buNone/>
             </a:pPr>
             <a:r>
-              <a:rPr sz="850" b="1" i="0" spc="109">
+              <a:rPr sz="1050" b="1" i="0" spc="109">
                 <a:solidFill>
                   <a:srgbClr val="8FA9BC"/>
                 </a:solidFill>
@@ -6925,12 +6925,12 @@
           <a:p>
             <a:pPr algn="r">
               <a:lnSpc>
-                <a:spcPts val="1660"/>
+                <a:spcPts val="1730"/>
               </a:lnSpc>
               <a:buNone/>
             </a:pPr>
             <a:r>
-              <a:rPr sz="1000" b="1" i="0" spc="156">
+              <a:rPr sz="1050" b="1" i="0" spc="156">
                 <a:solidFill>
                   <a:srgbClr val="8FA9BC"/>
                 </a:solidFill>
@@ -6957,7 +6957,7 @@
         </p:blipFill>
         <p:spPr>
           <a:xfrm>
-            <a:off x="792478" y="3135112"/>
+            <a:off x="792478" y="2325381"/>
             <a:ext cx="247649" cy="247649"/>
           </a:xfrm>
           <a:prstGeom prst="rect">
@@ -6973,7 +6973,7 @@
         </p:nvSpPr>
         <p:spPr>
           <a:xfrm>
-            <a:off x="1212187" y="3095725"/>
+            <a:off x="1212187" y="2285994"/>
             <a:ext cx="5012564" cy="228599"/>
           </a:xfrm>
           <a:prstGeom prst="rect">
@@ -7019,7 +7019,7 @@
         </p:blipFill>
         <p:spPr>
           <a:xfrm>
-            <a:off x="792478" y="3786361"/>
+            <a:off x="792478" y="3246541"/>
             <a:ext cx="247649" cy="247649"/>
           </a:xfrm>
           <a:prstGeom prst="rect">
@@ -7035,7 +7035,7 @@
         </p:nvSpPr>
         <p:spPr>
           <a:xfrm>
-            <a:off x="1212187" y="3746974"/>
+            <a:off x="1212187" y="3207154"/>
             <a:ext cx="5012564" cy="228599"/>
           </a:xfrm>
           <a:prstGeom prst="rect">
@@ -7081,7 +7081,7 @@
         </p:blipFill>
         <p:spPr>
           <a:xfrm>
-            <a:off x="792478" y="4437611"/>
+            <a:off x="792478" y="4167701"/>
             <a:ext cx="247649" cy="247649"/>
           </a:xfrm>
           <a:prstGeom prst="rect">
@@ -7097,7 +7097,7 @@
         </p:nvSpPr>
         <p:spPr>
           <a:xfrm>
-            <a:off x="1212187" y="4398224"/>
+            <a:off x="1212187" y="4128314"/>
             <a:ext cx="5012564" cy="228599"/>
           </a:xfrm>
           <a:prstGeom prst="rect">
@@ -7211,12 +7211,12 @@
           <a:p>
             <a:pPr algn="l">
               <a:lnSpc>
-                <a:spcPts val="1680"/>
+                <a:spcPts val="1839"/>
               </a:lnSpc>
               <a:buNone/>
             </a:pPr>
             <a:r>
-              <a:rPr sz="950" b="1" i="0" spc="172">
+              <a:rPr sz="1050" b="1" i="0" spc="172">
                 <a:solidFill>
                   <a:srgbClr val="4595C2"/>
                 </a:solidFill>
@@ -7235,7 +7235,7 @@
         </p:nvSpPr>
         <p:spPr>
           <a:xfrm>
-            <a:off x="6278864" y="3050005"/>
+            <a:off x="6278864" y="2240274"/>
             <a:ext cx="4352533" cy="228599"/>
           </a:xfrm>
           <a:prstGeom prst="rect">
@@ -7249,12 +7249,12 @@
           <a:p>
             <a:pPr algn="l">
               <a:lnSpc>
-                <a:spcPts val="1520"/>
+                <a:spcPts val="1730"/>
               </a:lnSpc>
               <a:buNone/>
             </a:pPr>
             <a:r>
-              <a:rPr sz="900" b="1" i="0" spc="203">
+              <a:rPr sz="1050" b="1" i="0" spc="203">
                 <a:solidFill>
                   <a:srgbClr val="4595C2"/>
                 </a:solidFill>
@@ -7281,7 +7281,7 @@
         </p:blipFill>
         <p:spPr>
           <a:xfrm>
-            <a:off x="6278864" y="3370044"/>
+            <a:off x="6278864" y="2560314"/>
             <a:ext cx="297179" cy="297179"/>
           </a:xfrm>
           <a:prstGeom prst="rect">
@@ -7297,7 +7297,7 @@
         </p:nvSpPr>
         <p:spPr>
           <a:xfrm>
-            <a:off x="6629383" y="3339564"/>
+            <a:off x="6629383" y="2529834"/>
             <a:ext cx="4352533" cy="228599"/>
           </a:xfrm>
           <a:prstGeom prst="rect">
@@ -7335,7 +7335,7 @@
         </p:nvSpPr>
         <p:spPr>
           <a:xfrm>
-            <a:off x="6629383" y="3738737"/>
+            <a:off x="6629383" y="2929006"/>
             <a:ext cx="4352533" cy="228599"/>
           </a:xfrm>
           <a:prstGeom prst="rect">
@@ -7349,12 +7349,12 @@
           <a:p>
             <a:pPr algn="l">
               <a:lnSpc>
-                <a:spcPts val="1660"/>
+                <a:spcPts val="1730"/>
               </a:lnSpc>
               <a:buNone/>
             </a:pPr>
             <a:r>
-              <a:rPr sz="1000" b="0" i="0">
+              <a:rPr sz="1050" b="0" i="0">
                 <a:solidFill>
                   <a:srgbClr val="8FA9BC"/>
                 </a:solidFill>
@@ -7381,7 +7381,7 @@
         </p:blipFill>
         <p:spPr>
           <a:xfrm>
-            <a:off x="6278864" y="4181458"/>
+            <a:off x="6278864" y="3371727"/>
             <a:ext cx="297179" cy="297179"/>
           </a:xfrm>
           <a:prstGeom prst="rect">
@@ -7397,7 +7397,7 @@
         </p:nvSpPr>
         <p:spPr>
           <a:xfrm>
-            <a:off x="6629383" y="4150978"/>
+            <a:off x="6629383" y="3341247"/>
             <a:ext cx="4507981" cy="228599"/>
           </a:xfrm>
           <a:prstGeom prst="rect">
@@ -7435,7 +7435,7 @@
         </p:nvSpPr>
         <p:spPr>
           <a:xfrm>
-            <a:off x="6629383" y="4550151"/>
+            <a:off x="6629383" y="3740420"/>
             <a:ext cx="4507981" cy="228599"/>
           </a:xfrm>
           <a:prstGeom prst="rect">
@@ -7449,12 +7449,12 @@
           <a:p>
             <a:pPr algn="l">
               <a:lnSpc>
-                <a:spcPts val="1660"/>
+                <a:spcPts val="1730"/>
               </a:lnSpc>
               <a:buNone/>
             </a:pPr>
             <a:r>
-              <a:rPr sz="1000" b="0" i="0">
+              <a:rPr sz="1050" b="0" i="0">
                 <a:solidFill>
                   <a:srgbClr val="8FA9BC"/>
                 </a:solidFill>
@@ -8450,7 +8450,7 @@
               <a:t>12</a:t>
             </a:r>
             <a:r>
-              <a:rPr sz="900" b="1" i="0" spc="203">
+              <a:rPr sz="1050" b="1" i="0" spc="203">
                 <a:solidFill>
                   <a:srgbClr val="5F7E97"/>
                 </a:solidFill>
@@ -8469,7 +8469,7 @@
         </p:nvSpPr>
         <p:spPr>
           <a:xfrm>
-            <a:off x="792478" y="579119"/>
+            <a:off x="792478" y="563879"/>
             <a:ext cx="9870923" cy="228599"/>
           </a:xfrm>
           <a:prstGeom prst="rect">
@@ -8483,12 +8483,12 @@
           <a:p>
             <a:pPr algn="l">
               <a:lnSpc>
-                <a:spcPts val="7400"/>
+                <a:spcPts val="5680"/>
               </a:lnSpc>
               <a:buNone/>
             </a:pPr>
             <a:r>
-              <a:rPr sz="5650" b="1" i="0">
+              <a:rPr sz="4000" b="1" i="0">
                 <a:solidFill>
                   <a:srgbClr val="4595C2"/>
                 </a:solidFill>
@@ -8507,7 +8507,7 @@
         </p:nvSpPr>
         <p:spPr>
           <a:xfrm>
-            <a:off x="792478" y="2565228"/>
+            <a:off x="792478" y="1407018"/>
             <a:ext cx="8161000" cy="228599"/>
           </a:xfrm>
           <a:prstGeom prst="rect">
@@ -8559,12 +8559,12 @@
           <a:p>
             <a:pPr algn="r">
               <a:lnSpc>
-                <a:spcPts val="1380"/>
+                <a:spcPts val="1730"/>
               </a:lnSpc>
               <a:buNone/>
             </a:pPr>
             <a:r>
-              <a:rPr sz="850" b="1" i="0" spc="109">
+              <a:rPr sz="1050" b="1" i="0" spc="109">
                 <a:solidFill>
                   <a:srgbClr val="8FA9BC"/>
                 </a:solidFill>
@@ -8597,12 +8597,12 @@
           <a:p>
             <a:pPr algn="r">
               <a:lnSpc>
-                <a:spcPts val="1660"/>
+                <a:spcPts val="1730"/>
               </a:lnSpc>
               <a:buNone/>
             </a:pPr>
             <a:r>
-              <a:rPr sz="1000" b="1" i="0" spc="156">
+              <a:rPr sz="1050" b="1" i="0" spc="156">
                 <a:solidFill>
                   <a:srgbClr val="8FA9BC"/>
                 </a:solidFill>
@@ -8629,7 +8629,7 @@
         </p:blipFill>
         <p:spPr>
           <a:xfrm>
-            <a:off x="792478" y="3135112"/>
+            <a:off x="792478" y="2325381"/>
             <a:ext cx="247649" cy="247649"/>
           </a:xfrm>
           <a:prstGeom prst="rect">
@@ -8645,7 +8645,7 @@
         </p:nvSpPr>
         <p:spPr>
           <a:xfrm>
-            <a:off x="1212187" y="3095725"/>
+            <a:off x="1212187" y="2285994"/>
             <a:ext cx="4235326" cy="228599"/>
           </a:xfrm>
           <a:prstGeom prst="rect">
@@ -8691,7 +8691,7 @@
         </p:blipFill>
         <p:spPr>
           <a:xfrm>
-            <a:off x="792478" y="3938761"/>
+            <a:off x="792478" y="3398940"/>
             <a:ext cx="247649" cy="247649"/>
           </a:xfrm>
           <a:prstGeom prst="rect">
@@ -8707,7 +8707,7 @@
         </p:nvSpPr>
         <p:spPr>
           <a:xfrm>
-            <a:off x="1212187" y="3899374"/>
+            <a:off x="1212187" y="3359554"/>
             <a:ext cx="4235326" cy="228599"/>
           </a:xfrm>
           <a:prstGeom prst="rect">
@@ -8753,7 +8753,7 @@
         </p:blipFill>
         <p:spPr>
           <a:xfrm>
-            <a:off x="792478" y="4742410"/>
+            <a:off x="792478" y="4472500"/>
             <a:ext cx="247649" cy="247649"/>
           </a:xfrm>
           <a:prstGeom prst="rect">
@@ -8769,7 +8769,7 @@
         </p:nvSpPr>
         <p:spPr>
           <a:xfrm>
-            <a:off x="1212187" y="4703023"/>
+            <a:off x="1212187" y="4433113"/>
             <a:ext cx="4235326" cy="228599"/>
           </a:xfrm>
           <a:prstGeom prst="rect">
@@ -8877,7 +8877,7 @@
         </p:blipFill>
         <p:spPr>
           <a:xfrm>
-            <a:off x="6126465" y="3135112"/>
+            <a:off x="6126465" y="2325381"/>
             <a:ext cx="247649" cy="247649"/>
           </a:xfrm>
           <a:prstGeom prst="rect">
@@ -8893,7 +8893,7 @@
         </p:nvSpPr>
         <p:spPr>
           <a:xfrm>
-            <a:off x="6546173" y="3095725"/>
+            <a:off x="6546173" y="2285994"/>
             <a:ext cx="4390773" cy="228599"/>
           </a:xfrm>
           <a:prstGeom prst="rect">
@@ -8939,7 +8939,7 @@
         </p:blipFill>
         <p:spPr>
           <a:xfrm>
-            <a:off x="6126465" y="4340585"/>
+            <a:off x="6126465" y="3398940"/>
             <a:ext cx="247649" cy="247649"/>
           </a:xfrm>
           <a:prstGeom prst="rect">
@@ -8955,7 +8955,7 @@
         </p:nvSpPr>
         <p:spPr>
           <a:xfrm>
-            <a:off x="6546173" y="4301199"/>
+            <a:off x="6546173" y="3359554"/>
             <a:ext cx="4390773" cy="228599"/>
           </a:xfrm>
           <a:prstGeom prst="rect">
@@ -9001,7 +9001,7 @@
         </p:blipFill>
         <p:spPr>
           <a:xfrm>
-            <a:off x="6126465" y="5546059"/>
+            <a:off x="6126465" y="4472500"/>
             <a:ext cx="247649" cy="247649"/>
           </a:xfrm>
           <a:prstGeom prst="rect">
@@ -9017,7 +9017,7 @@
         </p:nvSpPr>
         <p:spPr>
           <a:xfrm>
-            <a:off x="6546173" y="5506673"/>
+            <a:off x="6546173" y="4433113"/>
             <a:ext cx="4390773" cy="228599"/>
           </a:xfrm>
           <a:prstGeom prst="rect">
@@ -9972,7 +9972,7 @@
               <a:t>13</a:t>
             </a:r>
             <a:r>
-              <a:rPr sz="900" b="1" i="0" spc="203">
+              <a:rPr sz="1050" b="1" i="0" spc="203">
                 <a:solidFill>
                   <a:srgbClr val="5F7E97"/>
                 </a:solidFill>
@@ -9991,7 +9991,7 @@
         </p:nvSpPr>
         <p:spPr>
           <a:xfrm>
-            <a:off x="792478" y="579119"/>
+            <a:off x="792478" y="563879"/>
             <a:ext cx="9870923" cy="228599"/>
           </a:xfrm>
           <a:prstGeom prst="rect">
@@ -10005,12 +10005,12 @@
           <a:p>
             <a:pPr algn="l">
               <a:lnSpc>
-                <a:spcPts val="7400"/>
+                <a:spcPts val="5680"/>
               </a:lnSpc>
               <a:buNone/>
             </a:pPr>
             <a:r>
-              <a:rPr sz="5650" b="1" i="0">
+              <a:rPr sz="4000" b="1" i="0">
                 <a:solidFill>
                   <a:srgbClr val="4595C2"/>
                 </a:solidFill>
@@ -10029,7 +10029,7 @@
         </p:nvSpPr>
         <p:spPr>
           <a:xfrm>
-            <a:off x="792478" y="2565228"/>
+            <a:off x="792478" y="1407018"/>
             <a:ext cx="8549619" cy="228599"/>
           </a:xfrm>
           <a:prstGeom prst="rect">
@@ -10081,12 +10081,12 @@
           <a:p>
             <a:pPr algn="r">
               <a:lnSpc>
-                <a:spcPts val="1380"/>
+                <a:spcPts val="1730"/>
               </a:lnSpc>
               <a:buNone/>
             </a:pPr>
             <a:r>
-              <a:rPr sz="850" b="1" i="0" spc="109">
+              <a:rPr sz="1050" b="1" i="0" spc="109">
                 <a:solidFill>
                   <a:srgbClr val="8FA9BC"/>
                 </a:solidFill>
@@ -10119,12 +10119,12 @@
           <a:p>
             <a:pPr algn="r">
               <a:lnSpc>
-                <a:spcPts val="1660"/>
+                <a:spcPts val="1730"/>
               </a:lnSpc>
               <a:buNone/>
             </a:pPr>
             <a:r>
-              <a:rPr sz="1000" b="1" i="0" spc="156">
+              <a:rPr sz="1050" b="1" i="0" spc="156">
                 <a:solidFill>
                   <a:srgbClr val="8FA9BC"/>
                 </a:solidFill>
@@ -10151,7 +10151,7 @@
         </p:blipFill>
         <p:spPr>
           <a:xfrm>
-            <a:off x="792478" y="3135112"/>
+            <a:off x="792478" y="2708326"/>
             <a:ext cx="247649" cy="247649"/>
           </a:xfrm>
           <a:prstGeom prst="rect">
@@ -10167,7 +10167,7 @@
         </p:nvSpPr>
         <p:spPr>
           <a:xfrm>
-            <a:off x="1212187" y="3095725"/>
+            <a:off x="1212187" y="2668939"/>
             <a:ext cx="2914021" cy="228599"/>
           </a:xfrm>
           <a:prstGeom prst="rect">
@@ -10213,7 +10213,7 @@
         </p:blipFill>
         <p:spPr>
           <a:xfrm>
-            <a:off x="4373869" y="3135112"/>
+            <a:off x="4373869" y="2708326"/>
             <a:ext cx="247649" cy="247649"/>
           </a:xfrm>
           <a:prstGeom prst="rect">
@@ -10229,7 +10229,7 @@
         </p:nvSpPr>
         <p:spPr>
           <a:xfrm>
-            <a:off x="4793578" y="3095725"/>
+            <a:off x="4793578" y="2668939"/>
             <a:ext cx="2914021" cy="228599"/>
           </a:xfrm>
           <a:prstGeom prst="rect">
@@ -10275,7 +10275,7 @@
         </p:blipFill>
         <p:spPr>
           <a:xfrm>
-            <a:off x="7955260" y="3135112"/>
+            <a:off x="7955260" y="2708326"/>
             <a:ext cx="247649" cy="247649"/>
           </a:xfrm>
           <a:prstGeom prst="rect">
@@ -10291,7 +10291,7 @@
         </p:nvSpPr>
         <p:spPr>
           <a:xfrm>
-            <a:off x="8374969" y="3095725"/>
+            <a:off x="8374969" y="2668939"/>
             <a:ext cx="2914021" cy="228599"/>
           </a:xfrm>
           <a:prstGeom prst="rect">
@@ -10337,7 +10337,7 @@
         </p:blipFill>
         <p:spPr>
           <a:xfrm>
-            <a:off x="792478" y="3617744"/>
+            <a:off x="792478" y="3983436"/>
             <a:ext cx="247649" cy="247649"/>
           </a:xfrm>
           <a:prstGeom prst="rect">
@@ -10353,7 +10353,7 @@
         </p:nvSpPr>
         <p:spPr>
           <a:xfrm>
-            <a:off x="1212187" y="3578357"/>
+            <a:off x="1212187" y="3944050"/>
             <a:ext cx="2914021" cy="228599"/>
           </a:xfrm>
           <a:prstGeom prst="rect">
@@ -10399,7 +10399,7 @@
         </p:blipFill>
         <p:spPr>
           <a:xfrm>
-            <a:off x="4373869" y="3617744"/>
+            <a:off x="4373869" y="3983436"/>
             <a:ext cx="247649" cy="247649"/>
           </a:xfrm>
           <a:prstGeom prst="rect">
@@ -10415,7 +10415,7 @@
         </p:nvSpPr>
         <p:spPr>
           <a:xfrm>
-            <a:off x="4793578" y="3578357"/>
+            <a:off x="4793578" y="3944050"/>
             <a:ext cx="2914021" cy="228599"/>
           </a:xfrm>
           <a:prstGeom prst="rect">
@@ -10461,7 +10461,7 @@
         </p:blipFill>
         <p:spPr>
           <a:xfrm>
-            <a:off x="7955260" y="3617744"/>
+            <a:off x="7955260" y="3983436"/>
             <a:ext cx="247649" cy="247649"/>
           </a:xfrm>
           <a:prstGeom prst="rect">
@@ -10477,7 +10477,7 @@
         </p:nvSpPr>
         <p:spPr>
           <a:xfrm>
-            <a:off x="8374969" y="3578357"/>
+            <a:off x="8374969" y="3944050"/>
             <a:ext cx="2914021" cy="228599"/>
           </a:xfrm>
           <a:prstGeom prst="rect">
@@ -10523,7 +10523,7 @@
         </p:blipFill>
         <p:spPr>
           <a:xfrm>
-            <a:off x="792478" y="4100377"/>
+            <a:off x="792478" y="5258547"/>
             <a:ext cx="247649" cy="247649"/>
           </a:xfrm>
           <a:prstGeom prst="rect">
@@ -10539,7 +10539,7 @@
         </p:nvSpPr>
         <p:spPr>
           <a:xfrm>
-            <a:off x="1212187" y="4060990"/>
+            <a:off x="1212187" y="5219160"/>
             <a:ext cx="2914021" cy="228599"/>
           </a:xfrm>
           <a:prstGeom prst="rect">
@@ -10585,7 +10585,7 @@
         </p:blipFill>
         <p:spPr>
           <a:xfrm>
-            <a:off x="4373869" y="4100377"/>
+            <a:off x="4373869" y="5258547"/>
             <a:ext cx="247649" cy="247649"/>
           </a:xfrm>
           <a:prstGeom prst="rect">
@@ -10601,7 +10601,7 @@
         </p:nvSpPr>
         <p:spPr>
           <a:xfrm>
-            <a:off x="4793578" y="4060990"/>
+            <a:off x="4793578" y="5219160"/>
             <a:ext cx="2914021" cy="228599"/>
           </a:xfrm>
           <a:prstGeom prst="rect">
@@ -10647,7 +10647,7 @@
         </p:blipFill>
         <p:spPr>
           <a:xfrm>
-            <a:off x="7955260" y="4100377"/>
+            <a:off x="7955260" y="5258547"/>
             <a:ext cx="247649" cy="247649"/>
           </a:xfrm>
           <a:prstGeom prst="rect">
@@ -10663,7 +10663,7 @@
         </p:nvSpPr>
         <p:spPr>
           <a:xfrm>
-            <a:off x="8374969" y="4060990"/>
+            <a:off x="8374969" y="5219160"/>
             <a:ext cx="2914021" cy="228599"/>
           </a:xfrm>
           <a:prstGeom prst="rect">
@@ -11778,7 +11778,7 @@
               <a:t>14</a:t>
             </a:r>
             <a:r>
-              <a:rPr sz="900" b="1" i="0" spc="203">
+              <a:rPr sz="1050" b="1" i="0" spc="203">
                 <a:solidFill>
                   <a:srgbClr val="5F7E97"/>
                 </a:solidFill>
@@ -11797,7 +11797,7 @@
         </p:nvSpPr>
         <p:spPr>
           <a:xfrm>
-            <a:off x="792478" y="579119"/>
+            <a:off x="792478" y="563879"/>
             <a:ext cx="9870923" cy="228599"/>
           </a:xfrm>
           <a:prstGeom prst="rect">
@@ -11811,7 +11811,7 @@
           <a:p>
             <a:pPr algn="l">
               <a:lnSpc>
-                <a:spcPts val="7400"/>
+                <a:spcPts val="8030"/>
               </a:lnSpc>
               <a:buNone/>
             </a:pPr>
@@ -11835,7 +11835,7 @@
         </p:nvSpPr>
         <p:spPr>
           <a:xfrm>
-            <a:off x="792478" y="1625513"/>
+            <a:off x="792478" y="1706060"/>
             <a:ext cx="9171409" cy="228599"/>
           </a:xfrm>
           <a:prstGeom prst="rect">
@@ -11887,12 +11887,12 @@
           <a:p>
             <a:pPr algn="r">
               <a:lnSpc>
-                <a:spcPts val="1380"/>
+                <a:spcPts val="1730"/>
               </a:lnSpc>
               <a:buNone/>
             </a:pPr>
             <a:r>
-              <a:rPr sz="850" b="1" i="0" spc="109">
+              <a:rPr sz="1050" b="1" i="0" spc="109">
                 <a:solidFill>
                   <a:srgbClr val="8FA9BC"/>
                 </a:solidFill>
@@ -11925,12 +11925,12 @@
           <a:p>
             <a:pPr algn="r">
               <a:lnSpc>
-                <a:spcPts val="1660"/>
+                <a:spcPts val="1730"/>
               </a:lnSpc>
               <a:buNone/>
             </a:pPr>
             <a:r>
-              <a:rPr sz="1000" b="1" i="0" spc="156">
+              <a:rPr sz="1050" b="1" i="0" spc="156">
                 <a:solidFill>
                   <a:srgbClr val="8FA9BC"/>
                 </a:solidFill>
@@ -11957,7 +11957,7 @@
         </p:blipFill>
         <p:spPr>
           <a:xfrm>
-            <a:off x="792478" y="2195397"/>
+            <a:off x="792478" y="2325381"/>
             <a:ext cx="247649" cy="247649"/>
           </a:xfrm>
           <a:prstGeom prst="rect">
@@ -11973,7 +11973,7 @@
         </p:nvSpPr>
         <p:spPr>
           <a:xfrm>
-            <a:off x="1212187" y="2156010"/>
+            <a:off x="1212187" y="2285994"/>
             <a:ext cx="5634354" cy="228599"/>
           </a:xfrm>
           <a:prstGeom prst="rect">
@@ -12019,7 +12019,7 @@
         </p:blipFill>
         <p:spPr>
           <a:xfrm>
-            <a:off x="792478" y="2702108"/>
+            <a:off x="792478" y="2832093"/>
             <a:ext cx="247649" cy="247649"/>
           </a:xfrm>
           <a:prstGeom prst="rect">
@@ -12035,7 +12035,7 @@
         </p:nvSpPr>
         <p:spPr>
           <a:xfrm>
-            <a:off x="1212187" y="2662721"/>
+            <a:off x="1212187" y="2792706"/>
             <a:ext cx="5634354" cy="228599"/>
           </a:xfrm>
           <a:prstGeom prst="rect">
@@ -12081,7 +12081,7 @@
         </p:blipFill>
         <p:spPr>
           <a:xfrm>
-            <a:off x="792478" y="3208820"/>
+            <a:off x="792478" y="3338804"/>
             <a:ext cx="247649" cy="247649"/>
           </a:xfrm>
           <a:prstGeom prst="rect">
@@ -12097,7 +12097,7 @@
         </p:nvSpPr>
         <p:spPr>
           <a:xfrm>
-            <a:off x="1212187" y="3169433"/>
+            <a:off x="1212187" y="3299418"/>
             <a:ext cx="5634354" cy="228599"/>
           </a:xfrm>
           <a:prstGeom prst="rect">
@@ -12143,7 +12143,7 @@
         </p:blipFill>
         <p:spPr>
           <a:xfrm>
-            <a:off x="792478" y="3715532"/>
+            <a:off x="792478" y="3845516"/>
             <a:ext cx="247649" cy="247649"/>
           </a:xfrm>
           <a:prstGeom prst="rect">
@@ -12159,7 +12159,7 @@
         </p:nvSpPr>
         <p:spPr>
           <a:xfrm>
-            <a:off x="1212187" y="3676145"/>
+            <a:off x="1212187" y="3806129"/>
             <a:ext cx="5634354" cy="228599"/>
           </a:xfrm>
           <a:prstGeom prst="rect">
@@ -12205,7 +12205,7 @@
         </p:blipFill>
         <p:spPr>
           <a:xfrm>
-            <a:off x="792478" y="4222243"/>
+            <a:off x="792478" y="4352228"/>
             <a:ext cx="247649" cy="247649"/>
           </a:xfrm>
           <a:prstGeom prst="rect">
@@ -12221,7 +12221,7 @@
         </p:nvSpPr>
         <p:spPr>
           <a:xfrm>
-            <a:off x="1212187" y="4182856"/>
+            <a:off x="1212187" y="4312841"/>
             <a:ext cx="5634354" cy="228599"/>
           </a:xfrm>
           <a:prstGeom prst="rect">
@@ -12259,7 +12259,7 @@
         </p:nvSpPr>
         <p:spPr>
           <a:xfrm>
-            <a:off x="7315182" y="2003610"/>
+            <a:off x="7315182" y="2133595"/>
             <a:ext cx="1554476" cy="228599"/>
           </a:xfrm>
           <a:prstGeom prst="rect">
@@ -12297,7 +12297,7 @@
         </p:nvSpPr>
         <p:spPr>
           <a:xfrm>
-            <a:off x="7406621" y="2939976"/>
+            <a:off x="7406621" y="3069961"/>
             <a:ext cx="4041638" cy="228599"/>
           </a:xfrm>
           <a:prstGeom prst="rect">
@@ -12335,7 +12335,7 @@
         </p:nvSpPr>
         <p:spPr>
           <a:xfrm>
-            <a:off x="7406621" y="4241010"/>
+            <a:off x="7406621" y="4370994"/>
             <a:ext cx="3575295" cy="228599"/>
           </a:xfrm>
           <a:prstGeom prst="rect">
@@ -12349,12 +12349,12 @@
           <a:p>
             <a:pPr algn="l">
               <a:lnSpc>
-                <a:spcPts val="1450"/>
+                <a:spcPts val="1730"/>
               </a:lnSpc>
               <a:buNone/>
             </a:pPr>
             <a:r>
-              <a:rPr sz="900" b="1" i="0" spc="203">
+              <a:rPr sz="1050" b="1" i="0" spc="203">
                 <a:solidFill>
                   <a:srgbClr val="8FA9BC"/>
                 </a:solidFill>
@@ -12373,7 +12373,7 @@
         </p:nvSpPr>
         <p:spPr>
           <a:xfrm>
-            <a:off x="792478" y="4726449"/>
+            <a:off x="792478" y="4856433"/>
             <a:ext cx="5907009" cy="228599"/>
           </a:xfrm>
           <a:prstGeom prst="rect">
@@ -12387,12 +12387,12 @@
           <a:p>
             <a:pPr algn="l">
               <a:lnSpc>
-                <a:spcPts val="1660"/>
+                <a:spcPts val="1730"/>
               </a:lnSpc>
               <a:buNone/>
             </a:pPr>
             <a:r>
-              <a:rPr sz="1000" b="1" i="0" spc="203">
+              <a:rPr sz="1050" b="1" i="0" spc="203">
                 <a:solidFill>
                   <a:srgbClr val="4595C2"/>
                 </a:solidFill>
@@ -12411,7 +12411,7 @@
         </p:nvSpPr>
         <p:spPr>
           <a:xfrm>
-            <a:off x="838198" y="4970288"/>
+            <a:off x="838198" y="5100273"/>
             <a:ext cx="2269535" cy="228599"/>
           </a:xfrm>
           <a:prstGeom prst="rect">
@@ -12449,7 +12449,7 @@
         </p:nvSpPr>
         <p:spPr>
           <a:xfrm>
-            <a:off x="3124192" y="4970288"/>
+            <a:off x="3124192" y="5100273"/>
             <a:ext cx="2269535" cy="228599"/>
           </a:xfrm>
           <a:prstGeom prst="rect">
@@ -13477,7 +13477,7 @@
               <a:t>15</a:t>
             </a:r>
             <a:r>
-              <a:rPr sz="900" b="1" i="0" spc="203">
+              <a:rPr sz="1050" b="1" i="0" spc="203">
                 <a:solidFill>
                   <a:srgbClr val="5F7E97"/>
                 </a:solidFill>
@@ -13496,7 +13496,7 @@
         </p:nvSpPr>
         <p:spPr>
           <a:xfrm>
-            <a:off x="792478" y="579119"/>
+            <a:off x="792478" y="563879"/>
             <a:ext cx="9870923" cy="228599"/>
           </a:xfrm>
           <a:prstGeom prst="rect">
@@ -13510,12 +13510,12 @@
           <a:p>
             <a:pPr algn="l">
               <a:lnSpc>
-                <a:spcPts val="7400"/>
+                <a:spcPts val="5680"/>
               </a:lnSpc>
               <a:buNone/>
             </a:pPr>
             <a:r>
-              <a:rPr sz="5650" b="1" i="0">
+              <a:rPr sz="4000" b="1" i="0">
                 <a:solidFill>
                   <a:srgbClr val="4595C2"/>
                 </a:solidFill>
@@ -13534,7 +13534,7 @@
         </p:nvSpPr>
         <p:spPr>
           <a:xfrm>
-            <a:off x="792478" y="2565228"/>
+            <a:off x="792478" y="1407018"/>
             <a:ext cx="9171409" cy="228599"/>
           </a:xfrm>
           <a:prstGeom prst="rect">
@@ -13586,12 +13586,12 @@
           <a:p>
             <a:pPr algn="r">
               <a:lnSpc>
-                <a:spcPts val="1380"/>
+                <a:spcPts val="1730"/>
               </a:lnSpc>
               <a:buNone/>
             </a:pPr>
             <a:r>
-              <a:rPr sz="850" b="1" i="0" spc="109">
+              <a:rPr sz="1050" b="1" i="0" spc="109">
                 <a:solidFill>
                   <a:srgbClr val="8FA9BC"/>
                 </a:solidFill>
@@ -13624,12 +13624,12 @@
           <a:p>
             <a:pPr algn="r">
               <a:lnSpc>
-                <a:spcPts val="1660"/>
+                <a:spcPts val="1730"/>
               </a:lnSpc>
               <a:buNone/>
             </a:pPr>
             <a:r>
-              <a:rPr sz="1000" b="1" i="0" spc="156">
+              <a:rPr sz="1050" b="1" i="0" spc="156">
                 <a:solidFill>
                   <a:srgbClr val="8FA9BC"/>
                 </a:solidFill>
@@ -13656,7 +13656,7 @@
         </p:blipFill>
         <p:spPr>
           <a:xfrm>
-            <a:off x="792478" y="3135112"/>
+            <a:off x="792478" y="2396013"/>
             <a:ext cx="247649" cy="247649"/>
           </a:xfrm>
           <a:prstGeom prst="rect">
@@ -13672,7 +13672,7 @@
         </p:nvSpPr>
         <p:spPr>
           <a:xfrm>
-            <a:off x="1286253" y="3095725"/>
+            <a:off x="1286253" y="2356627"/>
             <a:ext cx="3537988" cy="228599"/>
           </a:xfrm>
           <a:prstGeom prst="rect">
@@ -13718,7 +13718,7 @@
         </p:blipFill>
         <p:spPr>
           <a:xfrm>
-            <a:off x="6126465" y="3135112"/>
+            <a:off x="6126465" y="2396013"/>
             <a:ext cx="247649" cy="247649"/>
           </a:xfrm>
           <a:prstGeom prst="rect">
@@ -13734,7 +13734,7 @@
         </p:nvSpPr>
         <p:spPr>
           <a:xfrm>
-            <a:off x="6620239" y="3095725"/>
+            <a:off x="6620239" y="2356627"/>
             <a:ext cx="3848883" cy="228599"/>
           </a:xfrm>
           <a:prstGeom prst="rect">
@@ -13780,7 +13780,7 @@
         </p:blipFill>
         <p:spPr>
           <a:xfrm>
-            <a:off x="792478" y="3587264"/>
+            <a:off x="792478" y="3054778"/>
             <a:ext cx="247649" cy="247649"/>
           </a:xfrm>
           <a:prstGeom prst="rect">
@@ -13796,7 +13796,7 @@
         </p:nvSpPr>
         <p:spPr>
           <a:xfrm>
-            <a:off x="1286253" y="3547877"/>
+            <a:off x="1286253" y="3015391"/>
             <a:ext cx="3537988" cy="228599"/>
           </a:xfrm>
           <a:prstGeom prst="rect">
@@ -13842,7 +13842,7 @@
         </p:blipFill>
         <p:spPr>
           <a:xfrm>
-            <a:off x="6126465" y="3587264"/>
+            <a:off x="6126465" y="3054778"/>
             <a:ext cx="247649" cy="247649"/>
           </a:xfrm>
           <a:prstGeom prst="rect">
@@ -13858,7 +13858,7 @@
         </p:nvSpPr>
         <p:spPr>
           <a:xfrm>
-            <a:off x="6620239" y="3547877"/>
+            <a:off x="6620239" y="3015391"/>
             <a:ext cx="3848883" cy="228599"/>
           </a:xfrm>
           <a:prstGeom prst="rect">
@@ -13904,7 +13904,7 @@
         </p:blipFill>
         <p:spPr>
           <a:xfrm>
-            <a:off x="792478" y="4039417"/>
+            <a:off x="792478" y="3713542"/>
             <a:ext cx="247649" cy="247649"/>
           </a:xfrm>
           <a:prstGeom prst="rect">
@@ -13920,7 +13920,7 @@
         </p:nvSpPr>
         <p:spPr>
           <a:xfrm>
-            <a:off x="1286253" y="4000030"/>
+            <a:off x="1286253" y="3674156"/>
             <a:ext cx="3537988" cy="228599"/>
           </a:xfrm>
           <a:prstGeom prst="rect">
@@ -13966,7 +13966,7 @@
         </p:blipFill>
         <p:spPr>
           <a:xfrm>
-            <a:off x="6126465" y="4039417"/>
+            <a:off x="6126465" y="3713542"/>
             <a:ext cx="247649" cy="247649"/>
           </a:xfrm>
           <a:prstGeom prst="rect">
@@ -13982,7 +13982,7 @@
         </p:nvSpPr>
         <p:spPr>
           <a:xfrm>
-            <a:off x="6620239" y="4000030"/>
+            <a:off x="6620239" y="3674156"/>
             <a:ext cx="3848883" cy="228599"/>
           </a:xfrm>
           <a:prstGeom prst="rect">
@@ -14028,7 +14028,7 @@
         </p:blipFill>
         <p:spPr>
           <a:xfrm>
-            <a:off x="792478" y="4491569"/>
+            <a:off x="792478" y="4372307"/>
             <a:ext cx="247649" cy="247649"/>
           </a:xfrm>
           <a:prstGeom prst="rect">
@@ -14044,7 +14044,7 @@
         </p:nvSpPr>
         <p:spPr>
           <a:xfrm>
-            <a:off x="1286253" y="4452183"/>
+            <a:off x="1286253" y="4332920"/>
             <a:ext cx="3537988" cy="228599"/>
           </a:xfrm>
           <a:prstGeom prst="rect">
@@ -14090,7 +14090,7 @@
         </p:blipFill>
         <p:spPr>
           <a:xfrm>
-            <a:off x="6126465" y="4491569"/>
+            <a:off x="6126465" y="4372307"/>
             <a:ext cx="247649" cy="247649"/>
           </a:xfrm>
           <a:prstGeom prst="rect">
@@ -14106,7 +14106,7 @@
         </p:nvSpPr>
         <p:spPr>
           <a:xfrm>
-            <a:off x="6620239" y="4452183"/>
+            <a:off x="6620239" y="4332920"/>
             <a:ext cx="3848883" cy="228599"/>
           </a:xfrm>
           <a:prstGeom prst="rect">
@@ -14152,7 +14152,7 @@
         </p:blipFill>
         <p:spPr>
           <a:xfrm>
-            <a:off x="792478" y="4943722"/>
+            <a:off x="792478" y="5031071"/>
             <a:ext cx="247649" cy="247649"/>
           </a:xfrm>
           <a:prstGeom prst="rect">
@@ -14168,7 +14168,7 @@
         </p:nvSpPr>
         <p:spPr>
           <a:xfrm>
-            <a:off x="1286253" y="4904335"/>
+            <a:off x="1286253" y="4991684"/>
             <a:ext cx="3537988" cy="228599"/>
           </a:xfrm>
           <a:prstGeom prst="rect">
@@ -14214,7 +14214,7 @@
         </p:blipFill>
         <p:spPr>
           <a:xfrm>
-            <a:off x="6126465" y="4943722"/>
+            <a:off x="6126465" y="5031071"/>
             <a:ext cx="247649" cy="247649"/>
           </a:xfrm>
           <a:prstGeom prst="rect">
@@ -14230,7 +14230,7 @@
         </p:nvSpPr>
         <p:spPr>
           <a:xfrm>
-            <a:off x="6620239" y="4904335"/>
+            <a:off x="6620239" y="4991684"/>
             <a:ext cx="3848883" cy="228599"/>
           </a:xfrm>
           <a:prstGeom prst="rect">
@@ -14276,7 +14276,7 @@
         </p:blipFill>
         <p:spPr>
           <a:xfrm>
-            <a:off x="792478" y="5395875"/>
+            <a:off x="792478" y="5689836"/>
             <a:ext cx="247649" cy="247649"/>
           </a:xfrm>
           <a:prstGeom prst="rect">
@@ -14292,7 +14292,7 @@
         </p:nvSpPr>
         <p:spPr>
           <a:xfrm>
-            <a:off x="1286253" y="5356488"/>
+            <a:off x="1286253" y="5650449"/>
             <a:ext cx="3537988" cy="228599"/>
           </a:xfrm>
           <a:prstGeom prst="rect">
@@ -14338,7 +14338,7 @@
         </p:blipFill>
         <p:spPr>
           <a:xfrm>
-            <a:off x="6126465" y="5395875"/>
+            <a:off x="6126465" y="5689836"/>
             <a:ext cx="247649" cy="247649"/>
           </a:xfrm>
           <a:prstGeom prst="rect">
@@ -14354,7 +14354,7 @@
         </p:nvSpPr>
         <p:spPr>
           <a:xfrm>
-            <a:off x="6620239" y="5356488"/>
+            <a:off x="6620239" y="5650449"/>
             <a:ext cx="3848883" cy="228599"/>
           </a:xfrm>
           <a:prstGeom prst="rect">
@@ -15709,7 +15709,7 @@
               <a:t>16</a:t>
             </a:r>
             <a:r>
-              <a:rPr sz="900" b="1" i="0" spc="203">
+              <a:rPr sz="1050" b="1" i="0" spc="203">
                 <a:solidFill>
                   <a:srgbClr val="5F7E97"/>
                 </a:solidFill>
@@ -15728,7 +15728,7 @@
         </p:nvSpPr>
         <p:spPr>
           <a:xfrm>
-            <a:off x="792478" y="579119"/>
+            <a:off x="792478" y="563879"/>
             <a:ext cx="9870923" cy="228599"/>
           </a:xfrm>
           <a:prstGeom prst="rect">
@@ -15742,12 +15742,12 @@
           <a:p>
             <a:pPr algn="l">
               <a:lnSpc>
-                <a:spcPts val="7400"/>
+                <a:spcPts val="6370"/>
               </a:lnSpc>
               <a:buNone/>
             </a:pPr>
             <a:r>
-              <a:rPr sz="5650" b="1" i="0">
+              <a:rPr sz="4450" b="1" i="0">
                 <a:solidFill>
                   <a:srgbClr val="4595C2"/>
                 </a:solidFill>
@@ -15766,7 +15766,7 @@
         </p:nvSpPr>
         <p:spPr>
           <a:xfrm>
-            <a:off x="792478" y="2565228"/>
+            <a:off x="792478" y="1494972"/>
             <a:ext cx="9171409" cy="228599"/>
           </a:xfrm>
           <a:prstGeom prst="rect">
@@ -15818,12 +15818,12 @@
           <a:p>
             <a:pPr algn="r">
               <a:lnSpc>
-                <a:spcPts val="1380"/>
+                <a:spcPts val="1730"/>
               </a:lnSpc>
               <a:buNone/>
             </a:pPr>
             <a:r>
-              <a:rPr sz="850" b="1" i="0" spc="109">
+              <a:rPr sz="1050" b="1" i="0" spc="109">
                 <a:solidFill>
                   <a:srgbClr val="8FA9BC"/>
                 </a:solidFill>
@@ -15856,12 +15856,12 @@
           <a:p>
             <a:pPr algn="r">
               <a:lnSpc>
-                <a:spcPts val="1660"/>
+                <a:spcPts val="1730"/>
               </a:lnSpc>
               <a:buNone/>
             </a:pPr>
             <a:r>
-              <a:rPr sz="1000" b="1" i="0" spc="156">
+              <a:rPr sz="1050" b="1" i="0" spc="156">
                 <a:solidFill>
                   <a:srgbClr val="8FA9BC"/>
                 </a:solidFill>
@@ -15888,7 +15888,7 @@
         </p:blipFill>
         <p:spPr>
           <a:xfrm>
-            <a:off x="792478" y="3135112"/>
+            <a:off x="792478" y="2390326"/>
             <a:ext cx="247649" cy="247649"/>
           </a:xfrm>
           <a:prstGeom prst="rect">
@@ -15904,7 +15904,7 @@
         </p:nvSpPr>
         <p:spPr>
           <a:xfrm>
-            <a:off x="1212187" y="3095725"/>
+            <a:off x="1212187" y="2350939"/>
             <a:ext cx="4079878" cy="228599"/>
           </a:xfrm>
           <a:prstGeom prst="rect">
@@ -15950,7 +15950,7 @@
         </p:blipFill>
         <p:spPr>
           <a:xfrm>
-            <a:off x="5516866" y="3135112"/>
+            <a:off x="5516866" y="2390326"/>
             <a:ext cx="247649" cy="247649"/>
           </a:xfrm>
           <a:prstGeom prst="rect">
@@ -15966,7 +15966,7 @@
         </p:nvSpPr>
         <p:spPr>
           <a:xfrm>
-            <a:off x="5936575" y="3095725"/>
+            <a:off x="5936575" y="2350939"/>
             <a:ext cx="4079878" cy="228599"/>
           </a:xfrm>
           <a:prstGeom prst="rect">
@@ -16012,7 +16012,7 @@
         </p:blipFill>
         <p:spPr>
           <a:xfrm>
-            <a:off x="792478" y="3587264"/>
+            <a:off x="792478" y="3079948"/>
             <a:ext cx="247649" cy="247649"/>
           </a:xfrm>
           <a:prstGeom prst="rect">
@@ -16028,7 +16028,7 @@
         </p:nvSpPr>
         <p:spPr>
           <a:xfrm>
-            <a:off x="1212187" y="3547877"/>
+            <a:off x="1212187" y="3040561"/>
             <a:ext cx="4079878" cy="228599"/>
           </a:xfrm>
           <a:prstGeom prst="rect">
@@ -16074,7 +16074,7 @@
         </p:blipFill>
         <p:spPr>
           <a:xfrm>
-            <a:off x="5516866" y="3587264"/>
+            <a:off x="5516866" y="3079948"/>
             <a:ext cx="247649" cy="247649"/>
           </a:xfrm>
           <a:prstGeom prst="rect">
@@ -16090,7 +16090,7 @@
         </p:nvSpPr>
         <p:spPr>
           <a:xfrm>
-            <a:off x="5936575" y="3547877"/>
+            <a:off x="5936575" y="3040561"/>
             <a:ext cx="4079878" cy="228599"/>
           </a:xfrm>
           <a:prstGeom prst="rect">
@@ -16136,7 +16136,7 @@
         </p:blipFill>
         <p:spPr>
           <a:xfrm>
-            <a:off x="792478" y="4039417"/>
+            <a:off x="792478" y="3769570"/>
             <a:ext cx="247649" cy="247649"/>
           </a:xfrm>
           <a:prstGeom prst="rect">
@@ -16152,7 +16152,7 @@
         </p:nvSpPr>
         <p:spPr>
           <a:xfrm>
-            <a:off x="1212187" y="4000030"/>
+            <a:off x="1212187" y="3730183"/>
             <a:ext cx="4079878" cy="228599"/>
           </a:xfrm>
           <a:prstGeom prst="rect">
@@ -16198,7 +16198,7 @@
         </p:blipFill>
         <p:spPr>
           <a:xfrm>
-            <a:off x="5516866" y="4039417"/>
+            <a:off x="5516866" y="3769570"/>
             <a:ext cx="247649" cy="247649"/>
           </a:xfrm>
           <a:prstGeom prst="rect">
@@ -16214,7 +16214,7 @@
         </p:nvSpPr>
         <p:spPr>
           <a:xfrm>
-            <a:off x="5936575" y="4000030"/>
+            <a:off x="5936575" y="3730183"/>
             <a:ext cx="4079878" cy="228599"/>
           </a:xfrm>
           <a:prstGeom prst="rect">
@@ -16260,7 +16260,7 @@
         </p:blipFill>
         <p:spPr>
           <a:xfrm>
-            <a:off x="792478" y="4491569"/>
+            <a:off x="792478" y="4459192"/>
             <a:ext cx="247649" cy="247649"/>
           </a:xfrm>
           <a:prstGeom prst="rect">
@@ -16276,7 +16276,7 @@
         </p:nvSpPr>
         <p:spPr>
           <a:xfrm>
-            <a:off x="1212187" y="4452183"/>
+            <a:off x="1212187" y="4419805"/>
             <a:ext cx="4079878" cy="228599"/>
           </a:xfrm>
           <a:prstGeom prst="rect">
@@ -16322,7 +16322,7 @@
         </p:blipFill>
         <p:spPr>
           <a:xfrm>
-            <a:off x="5516866" y="4491569"/>
+            <a:off x="5516866" y="4459192"/>
             <a:ext cx="247649" cy="247649"/>
           </a:xfrm>
           <a:prstGeom prst="rect">
@@ -16338,7 +16338,7 @@
         </p:nvSpPr>
         <p:spPr>
           <a:xfrm>
-            <a:off x="5936575" y="4452183"/>
+            <a:off x="5936575" y="4419805"/>
             <a:ext cx="4079878" cy="228599"/>
           </a:xfrm>
           <a:prstGeom prst="rect">
@@ -16376,7 +16376,7 @@
         </p:nvSpPr>
         <p:spPr>
           <a:xfrm>
-            <a:off x="792478" y="5087215"/>
+            <a:off x="792478" y="5292306"/>
             <a:ext cx="5907009" cy="228599"/>
           </a:xfrm>
           <a:prstGeom prst="rect">
@@ -16390,12 +16390,12 @@
           <a:p>
             <a:pPr algn="l">
               <a:lnSpc>
-                <a:spcPts val="1660"/>
+                <a:spcPts val="1730"/>
               </a:lnSpc>
               <a:buNone/>
             </a:pPr>
             <a:r>
-              <a:rPr sz="1000" b="1" i="0" spc="203">
+              <a:rPr sz="1050" b="1" i="0" spc="203">
                 <a:solidFill>
                   <a:srgbClr val="4595C2"/>
                 </a:solidFill>
@@ -16414,7 +16414,7 @@
         </p:nvSpPr>
         <p:spPr>
           <a:xfrm>
-            <a:off x="792478" y="5346294"/>
+            <a:off x="792478" y="5551386"/>
             <a:ext cx="1911749" cy="228599"/>
           </a:xfrm>
           <a:prstGeom prst="rect">
@@ -16452,7 +16452,7 @@
         </p:nvSpPr>
         <p:spPr>
           <a:xfrm>
-            <a:off x="2727702" y="5346294"/>
+            <a:off x="2727702" y="5551386"/>
             <a:ext cx="1911749" cy="228599"/>
           </a:xfrm>
           <a:prstGeom prst="rect">
@@ -16490,7 +16490,7 @@
         </p:nvSpPr>
         <p:spPr>
           <a:xfrm>
-            <a:off x="4662926" y="5346294"/>
+            <a:off x="4662926" y="5551386"/>
             <a:ext cx="1911749" cy="228599"/>
           </a:xfrm>
           <a:prstGeom prst="rect">
@@ -16528,7 +16528,7 @@
         </p:nvSpPr>
         <p:spPr>
           <a:xfrm>
-            <a:off x="6598150" y="5346294"/>
+            <a:off x="6598150" y="5551386"/>
             <a:ext cx="1911749" cy="228599"/>
           </a:xfrm>
           <a:prstGeom prst="rect">
@@ -16566,7 +16566,7 @@
         </p:nvSpPr>
         <p:spPr>
           <a:xfrm>
-            <a:off x="8533374" y="5346294"/>
+            <a:off x="8533374" y="5551386"/>
             <a:ext cx="1911749" cy="228599"/>
           </a:xfrm>
           <a:prstGeom prst="rect">
@@ -17811,7 +17811,7 @@
               <a:t>17</a:t>
             </a:r>
             <a:r>
-              <a:rPr sz="900" b="1" i="0" spc="203">
+              <a:rPr sz="1050" b="1" i="0" spc="203">
                 <a:solidFill>
                   <a:srgbClr val="5F7E97"/>
                 </a:solidFill>
@@ -17830,7 +17830,7 @@
         </p:nvSpPr>
         <p:spPr>
           <a:xfrm>
-            <a:off x="792478" y="579119"/>
+            <a:off x="792478" y="563879"/>
             <a:ext cx="9870923" cy="228599"/>
           </a:xfrm>
           <a:prstGeom prst="rect">
@@ -17844,12 +17844,12 @@
           <a:p>
             <a:pPr algn="l">
               <a:lnSpc>
-                <a:spcPts val="7400"/>
+                <a:spcPts val="5680"/>
               </a:lnSpc>
               <a:buNone/>
             </a:pPr>
             <a:r>
-              <a:rPr sz="5650" b="1" i="0">
+              <a:rPr sz="4000" b="1" i="0">
                 <a:solidFill>
                   <a:srgbClr val="4595C2"/>
                 </a:solidFill>
@@ -17868,7 +17868,7 @@
         </p:nvSpPr>
         <p:spPr>
           <a:xfrm>
-            <a:off x="792478" y="2565228"/>
+            <a:off x="792478" y="1407018"/>
             <a:ext cx="9171409" cy="228599"/>
           </a:xfrm>
           <a:prstGeom prst="rect">
@@ -17920,12 +17920,12 @@
           <a:p>
             <a:pPr algn="r">
               <a:lnSpc>
-                <a:spcPts val="1380"/>
+                <a:spcPts val="1730"/>
               </a:lnSpc>
               <a:buNone/>
             </a:pPr>
             <a:r>
-              <a:rPr sz="850" b="1" i="0" spc="109">
+              <a:rPr sz="1050" b="1" i="0" spc="109">
                 <a:solidFill>
                   <a:srgbClr val="8FA9BC"/>
                 </a:solidFill>
@@ -17958,12 +17958,12 @@
           <a:p>
             <a:pPr algn="r">
               <a:lnSpc>
-                <a:spcPts val="1660"/>
+                <a:spcPts val="1730"/>
               </a:lnSpc>
               <a:buNone/>
             </a:pPr>
             <a:r>
-              <a:rPr sz="1000" b="1" i="0" spc="156">
+              <a:rPr sz="1050" b="1" i="0" spc="156">
                 <a:solidFill>
                   <a:srgbClr val="8FA9BC"/>
                 </a:solidFill>
@@ -17990,7 +17990,7 @@
         </p:blipFill>
         <p:spPr>
           <a:xfrm>
-            <a:off x="792478" y="3135112"/>
+            <a:off x="792478" y="2325381"/>
             <a:ext cx="247649" cy="247649"/>
           </a:xfrm>
           <a:prstGeom prst="rect">
@@ -18006,7 +18006,7 @@
         </p:nvSpPr>
         <p:spPr>
           <a:xfrm>
-            <a:off x="1212187" y="3095725"/>
+            <a:off x="1212187" y="2285994"/>
             <a:ext cx="4235326" cy="228599"/>
           </a:xfrm>
           <a:prstGeom prst="rect">
@@ -18052,7 +18052,7 @@
         </p:blipFill>
         <p:spPr>
           <a:xfrm>
-            <a:off x="792478" y="3989561"/>
+            <a:off x="792478" y="3449740"/>
             <a:ext cx="247649" cy="247649"/>
           </a:xfrm>
           <a:prstGeom prst="rect">
@@ -18068,7 +18068,7 @@
         </p:nvSpPr>
         <p:spPr>
           <a:xfrm>
-            <a:off x="1212187" y="3950174"/>
+            <a:off x="1212187" y="3410354"/>
             <a:ext cx="4235326" cy="228599"/>
           </a:xfrm>
           <a:prstGeom prst="rect">
@@ -18114,7 +18114,7 @@
         </p:blipFill>
         <p:spPr>
           <a:xfrm>
-            <a:off x="792478" y="4844010"/>
+            <a:off x="792478" y="4574100"/>
             <a:ext cx="247649" cy="247649"/>
           </a:xfrm>
           <a:prstGeom prst="rect">
@@ -18130,7 +18130,7 @@
         </p:nvSpPr>
         <p:spPr>
           <a:xfrm>
-            <a:off x="1212187" y="4804623"/>
+            <a:off x="1212187" y="4534713"/>
             <a:ext cx="4235326" cy="228599"/>
           </a:xfrm>
           <a:prstGeom prst="rect">
@@ -18238,7 +18238,7 @@
         </p:blipFill>
         <p:spPr>
           <a:xfrm>
-            <a:off x="6126465" y="3135112"/>
+            <a:off x="6126465" y="2325381"/>
             <a:ext cx="247649" cy="247649"/>
           </a:xfrm>
           <a:prstGeom prst="rect">
@@ -18254,7 +18254,7 @@
         </p:nvSpPr>
         <p:spPr>
           <a:xfrm>
-            <a:off x="6546173" y="3095725"/>
+            <a:off x="6546173" y="2285994"/>
             <a:ext cx="4390773" cy="228599"/>
           </a:xfrm>
           <a:prstGeom prst="rect">
@@ -18300,7 +18300,7 @@
         </p:blipFill>
         <p:spPr>
           <a:xfrm>
-            <a:off x="6126465" y="4416785"/>
+            <a:off x="6126465" y="3794954"/>
             <a:ext cx="247649" cy="247649"/>
           </a:xfrm>
           <a:prstGeom prst="rect">
@@ -18316,7 +18316,7 @@
         </p:nvSpPr>
         <p:spPr>
           <a:xfrm>
-            <a:off x="6546173" y="4377399"/>
+            <a:off x="6546173" y="3755567"/>
             <a:ext cx="4390773" cy="228599"/>
           </a:xfrm>
           <a:prstGeom prst="rect">
@@ -18362,7 +18362,7 @@
         </p:blipFill>
         <p:spPr>
           <a:xfrm>
-            <a:off x="6126465" y="5698459"/>
+            <a:off x="6126465" y="5264526"/>
             <a:ext cx="247649" cy="247649"/>
           </a:xfrm>
           <a:prstGeom prst="rect">
@@ -18378,7 +18378,7 @@
         </p:nvSpPr>
         <p:spPr>
           <a:xfrm>
-            <a:off x="6546173" y="5659072"/>
+            <a:off x="6546173" y="5225139"/>
             <a:ext cx="4390773" cy="228599"/>
           </a:xfrm>
           <a:prstGeom prst="rect">
@@ -19333,7 +19333,7 @@
               <a:t>18</a:t>
             </a:r>
             <a:r>
-              <a:rPr sz="900" b="1" i="0" spc="203">
+              <a:rPr sz="1050" b="1" i="0" spc="203">
                 <a:solidFill>
                   <a:srgbClr val="5F7E97"/>
                 </a:solidFill>
@@ -19352,7 +19352,7 @@
         </p:nvSpPr>
         <p:spPr>
           <a:xfrm>
-            <a:off x="792478" y="579119"/>
+            <a:off x="792478" y="563879"/>
             <a:ext cx="9870923" cy="228599"/>
           </a:xfrm>
           <a:prstGeom prst="rect">
@@ -19366,12 +19366,12 @@
           <a:p>
             <a:pPr algn="l">
               <a:lnSpc>
-                <a:spcPts val="7400"/>
+                <a:spcPts val="7200"/>
               </a:lnSpc>
               <a:buNone/>
             </a:pPr>
             <a:r>
-              <a:rPr sz="5650" b="1" i="0">
+              <a:rPr sz="5050" b="1" i="0">
                 <a:solidFill>
                   <a:srgbClr val="4595C2"/>
                 </a:solidFill>
@@ -19390,7 +19390,7 @@
         </p:nvSpPr>
         <p:spPr>
           <a:xfrm>
-            <a:off x="792478" y="2565228"/>
+            <a:off x="792478" y="1600516"/>
             <a:ext cx="9171409" cy="228599"/>
           </a:xfrm>
           <a:prstGeom prst="rect">
@@ -19442,12 +19442,12 @@
           <a:p>
             <a:pPr algn="r">
               <a:lnSpc>
-                <a:spcPts val="1380"/>
+                <a:spcPts val="1730"/>
               </a:lnSpc>
               <a:buNone/>
             </a:pPr>
             <a:r>
-              <a:rPr sz="850" b="1" i="0" spc="109">
+              <a:rPr sz="1050" b="1" i="0" spc="109">
                 <a:solidFill>
                   <a:srgbClr val="8FA9BC"/>
                 </a:solidFill>
@@ -19480,12 +19480,12 @@
           <a:p>
             <a:pPr algn="r">
               <a:lnSpc>
-                <a:spcPts val="1660"/>
+                <a:spcPts val="1730"/>
               </a:lnSpc>
               <a:buNone/>
             </a:pPr>
             <a:r>
-              <a:rPr sz="1000" b="1" i="0" spc="156">
+              <a:rPr sz="1050" b="1" i="0" spc="156">
                 <a:solidFill>
                   <a:srgbClr val="8FA9BC"/>
                 </a:solidFill>
@@ -19512,7 +19512,7 @@
         </p:blipFill>
         <p:spPr>
           <a:xfrm>
-            <a:off x="792478" y="3135112"/>
+            <a:off x="792478" y="2325381"/>
             <a:ext cx="247649" cy="247649"/>
           </a:xfrm>
           <a:prstGeom prst="rect">
@@ -19528,7 +19528,7 @@
         </p:nvSpPr>
         <p:spPr>
           <a:xfrm>
-            <a:off x="1212187" y="3095725"/>
+            <a:off x="1212187" y="2285994"/>
             <a:ext cx="4390773" cy="228599"/>
           </a:xfrm>
           <a:prstGeom prst="rect">
@@ -19574,7 +19574,7 @@
         </p:blipFill>
         <p:spPr>
           <a:xfrm>
-            <a:off x="792478" y="3869323"/>
+            <a:off x="792478" y="3329503"/>
             <a:ext cx="247649" cy="247649"/>
           </a:xfrm>
           <a:prstGeom prst="rect">
@@ -19590,7 +19590,7 @@
         </p:nvSpPr>
         <p:spPr>
           <a:xfrm>
-            <a:off x="1212187" y="3829936"/>
+            <a:off x="1212187" y="3290116"/>
             <a:ext cx="4390773" cy="228599"/>
           </a:xfrm>
           <a:prstGeom prst="rect">
@@ -19636,7 +19636,7 @@
         </p:blipFill>
         <p:spPr>
           <a:xfrm>
-            <a:off x="792478" y="4603535"/>
+            <a:off x="792478" y="4333624"/>
             <a:ext cx="247649" cy="247649"/>
           </a:xfrm>
           <a:prstGeom prst="rect">
@@ -19652,7 +19652,7 @@
         </p:nvSpPr>
         <p:spPr>
           <a:xfrm>
-            <a:off x="1212187" y="4564148"/>
+            <a:off x="1212187" y="4294238"/>
             <a:ext cx="4390773" cy="228599"/>
           </a:xfrm>
           <a:prstGeom prst="rect">
@@ -19760,7 +19760,7 @@
         </p:blipFill>
         <p:spPr>
           <a:xfrm>
-            <a:off x="6126465" y="3135112"/>
+            <a:off x="6126465" y="2325381"/>
             <a:ext cx="247649" cy="247649"/>
           </a:xfrm>
           <a:prstGeom prst="rect">
@@ -19776,7 +19776,7 @@
         </p:nvSpPr>
         <p:spPr>
           <a:xfrm>
-            <a:off x="6546173" y="3095725"/>
+            <a:off x="6546173" y="2285994"/>
             <a:ext cx="4235326" cy="228599"/>
           </a:xfrm>
           <a:prstGeom prst="rect">
@@ -19822,7 +19822,7 @@
         </p:blipFill>
         <p:spPr>
           <a:xfrm>
-            <a:off x="6126465" y="4378685"/>
+            <a:off x="6126465" y="3794954"/>
             <a:ext cx="247649" cy="247649"/>
           </a:xfrm>
           <a:prstGeom prst="rect">
@@ -19838,7 +19838,7 @@
         </p:nvSpPr>
         <p:spPr>
           <a:xfrm>
-            <a:off x="6546173" y="4339299"/>
+            <a:off x="6546173" y="3755567"/>
             <a:ext cx="4235326" cy="228599"/>
           </a:xfrm>
           <a:prstGeom prst="rect">
@@ -19884,7 +19884,7 @@
         </p:blipFill>
         <p:spPr>
           <a:xfrm>
-            <a:off x="6126465" y="5622259"/>
+            <a:off x="6126465" y="5264526"/>
             <a:ext cx="247649" cy="247649"/>
           </a:xfrm>
           <a:prstGeom prst="rect">
@@ -19900,7 +19900,7 @@
         </p:nvSpPr>
         <p:spPr>
           <a:xfrm>
-            <a:off x="6546173" y="5582872"/>
+            <a:off x="6546173" y="5225139"/>
             <a:ext cx="4235326" cy="228599"/>
           </a:xfrm>
           <a:prstGeom prst="rect">
@@ -20855,7 +20855,7 @@
               <a:t>19</a:t>
             </a:r>
             <a:r>
-              <a:rPr sz="900" b="1" i="0" spc="203">
+              <a:rPr sz="1050" b="1" i="0" spc="203">
                 <a:solidFill>
                   <a:srgbClr val="5F7E97"/>
                 </a:solidFill>
@@ -20874,7 +20874,7 @@
         </p:nvSpPr>
         <p:spPr>
           <a:xfrm>
-            <a:off x="792478" y="579119"/>
+            <a:off x="792478" y="563879"/>
             <a:ext cx="9870923" cy="228599"/>
           </a:xfrm>
           <a:prstGeom prst="rect">
@@ -20888,7 +20888,7 @@
           <a:p>
             <a:pPr algn="l">
               <a:lnSpc>
-                <a:spcPts val="7400"/>
+                <a:spcPts val="8030"/>
               </a:lnSpc>
               <a:buNone/>
             </a:pPr>
@@ -20912,7 +20912,7 @@
         </p:nvSpPr>
         <p:spPr>
           <a:xfrm>
-            <a:off x="792478" y="1625513"/>
+            <a:off x="792478" y="1706060"/>
             <a:ext cx="8549619" cy="228599"/>
           </a:xfrm>
           <a:prstGeom prst="rect">
@@ -20964,12 +20964,12 @@
           <a:p>
             <a:pPr algn="r">
               <a:lnSpc>
-                <a:spcPts val="1380"/>
+                <a:spcPts val="1730"/>
               </a:lnSpc>
               <a:buNone/>
             </a:pPr>
             <a:r>
-              <a:rPr sz="850" b="1" i="0" spc="109">
+              <a:rPr sz="1050" b="1" i="0" spc="109">
                 <a:solidFill>
                   <a:srgbClr val="8FA9BC"/>
                 </a:solidFill>
@@ -21002,12 +21002,12 @@
           <a:p>
             <a:pPr algn="r">
               <a:lnSpc>
-                <a:spcPts val="1660"/>
+                <a:spcPts val="1730"/>
               </a:lnSpc>
               <a:buNone/>
             </a:pPr>
             <a:r>
-              <a:rPr sz="1000" b="1" i="0" spc="156">
+              <a:rPr sz="1050" b="1" i="0" spc="156">
                 <a:solidFill>
                   <a:srgbClr val="8FA9BC"/>
                 </a:solidFill>
@@ -21026,7 +21026,7 @@
         </p:nvSpPr>
         <p:spPr>
           <a:xfrm>
-            <a:off x="792478" y="2110290"/>
+            <a:off x="792478" y="2240274"/>
             <a:ext cx="2331714" cy="228599"/>
           </a:xfrm>
           <a:prstGeom prst="rect">
@@ -21064,7 +21064,7 @@
         </p:nvSpPr>
         <p:spPr>
           <a:xfrm>
-            <a:off x="792478" y="2354129"/>
+            <a:off x="792478" y="2484114"/>
             <a:ext cx="3419847" cy="228599"/>
           </a:xfrm>
           <a:prstGeom prst="rect">
@@ -21078,7 +21078,7 @@
           <a:p>
             <a:pPr algn="l">
               <a:lnSpc>
-                <a:spcPts val="1700"/>
+                <a:spcPts val="1710"/>
               </a:lnSpc>
               <a:buNone/>
             </a:pPr>
@@ -21110,7 +21110,7 @@
         </p:blipFill>
         <p:spPr>
           <a:xfrm>
-            <a:off x="792478" y="2662119"/>
+            <a:off x="792478" y="2792103"/>
             <a:ext cx="227837" cy="227837"/>
           </a:xfrm>
           <a:prstGeom prst="rect">
@@ -21126,7 +21126,7 @@
         </p:nvSpPr>
         <p:spPr>
           <a:xfrm>
-            <a:off x="1212187" y="2628449"/>
+            <a:off x="1212187" y="2758433"/>
             <a:ext cx="2914021" cy="228599"/>
           </a:xfrm>
           <a:prstGeom prst="rect">
@@ -21172,7 +21172,7 @@
         </p:blipFill>
         <p:spPr>
           <a:xfrm>
-            <a:off x="792478" y="3426443"/>
+            <a:off x="792478" y="3523931"/>
             <a:ext cx="227837" cy="227837"/>
           </a:xfrm>
           <a:prstGeom prst="rect">
@@ -21188,7 +21188,7 @@
         </p:nvSpPr>
         <p:spPr>
           <a:xfrm>
-            <a:off x="1212187" y="3392773"/>
+            <a:off x="1212187" y="3490261"/>
             <a:ext cx="2914021" cy="228599"/>
           </a:xfrm>
           <a:prstGeom prst="rect">
@@ -21234,7 +21234,7 @@
         </p:blipFill>
         <p:spPr>
           <a:xfrm>
-            <a:off x="792478" y="4190767"/>
+            <a:off x="792478" y="4255759"/>
             <a:ext cx="227837" cy="227837"/>
           </a:xfrm>
           <a:prstGeom prst="rect">
@@ -21250,7 +21250,7 @@
         </p:nvSpPr>
         <p:spPr>
           <a:xfrm>
-            <a:off x="1212187" y="4157097"/>
+            <a:off x="1212187" y="4222089"/>
             <a:ext cx="2914021" cy="228599"/>
           </a:xfrm>
           <a:prstGeom prst="rect">
@@ -21296,7 +21296,7 @@
         </p:blipFill>
         <p:spPr>
           <a:xfrm>
-            <a:off x="792478" y="4955091"/>
+            <a:off x="792478" y="4987587"/>
             <a:ext cx="227837" cy="227837"/>
           </a:xfrm>
           <a:prstGeom prst="rect">
@@ -21312,7 +21312,7 @@
         </p:nvSpPr>
         <p:spPr>
           <a:xfrm>
-            <a:off x="1212187" y="4921421"/>
+            <a:off x="1212187" y="4953917"/>
             <a:ext cx="2914021" cy="228599"/>
           </a:xfrm>
           <a:prstGeom prst="rect">
@@ -21412,7 +21412,7 @@
         </p:nvSpPr>
         <p:spPr>
           <a:xfrm>
-            <a:off x="4404349" y="2110290"/>
+            <a:off x="4404349" y="2240274"/>
             <a:ext cx="2331714" cy="228599"/>
           </a:xfrm>
           <a:prstGeom prst="rect">
@@ -21450,7 +21450,7 @@
         </p:nvSpPr>
         <p:spPr>
           <a:xfrm>
-            <a:off x="4404349" y="2354129"/>
+            <a:off x="4404349" y="2484114"/>
             <a:ext cx="3419847" cy="228599"/>
           </a:xfrm>
           <a:prstGeom prst="rect">
@@ -21464,7 +21464,7 @@
           <a:p>
             <a:pPr algn="l">
               <a:lnSpc>
-                <a:spcPts val="1700"/>
+                <a:spcPts val="1710"/>
               </a:lnSpc>
               <a:buNone/>
             </a:pPr>
@@ -21496,7 +21496,7 @@
         </p:blipFill>
         <p:spPr>
           <a:xfrm>
-            <a:off x="4404349" y="2662119"/>
+            <a:off x="4404349" y="2792103"/>
             <a:ext cx="227837" cy="227837"/>
           </a:xfrm>
           <a:prstGeom prst="rect">
@@ -21512,7 +21512,7 @@
         </p:nvSpPr>
         <p:spPr>
           <a:xfrm>
-            <a:off x="4824058" y="2628449"/>
+            <a:off x="4824058" y="2758433"/>
             <a:ext cx="2914021" cy="228599"/>
           </a:xfrm>
           <a:prstGeom prst="rect">
@@ -21558,7 +21558,7 @@
         </p:blipFill>
         <p:spPr>
           <a:xfrm>
-            <a:off x="4404349" y="3595271"/>
+            <a:off x="4404349" y="3681927"/>
             <a:ext cx="227837" cy="227837"/>
           </a:xfrm>
           <a:prstGeom prst="rect">
@@ -21574,7 +21574,7 @@
         </p:nvSpPr>
         <p:spPr>
           <a:xfrm>
-            <a:off x="4824058" y="3561601"/>
+            <a:off x="4824058" y="3648257"/>
             <a:ext cx="2914021" cy="228599"/>
           </a:xfrm>
           <a:prstGeom prst="rect">
@@ -21620,7 +21620,7 @@
         </p:blipFill>
         <p:spPr>
           <a:xfrm>
-            <a:off x="4404349" y="4528423"/>
+            <a:off x="4404349" y="4571751"/>
             <a:ext cx="227837" cy="227837"/>
           </a:xfrm>
           <a:prstGeom prst="rect">
@@ -21636,7 +21636,7 @@
         </p:nvSpPr>
         <p:spPr>
           <a:xfrm>
-            <a:off x="4824058" y="4494753"/>
+            <a:off x="4824058" y="4538081"/>
             <a:ext cx="2914021" cy="228599"/>
           </a:xfrm>
           <a:prstGeom prst="rect">
@@ -21736,7 +21736,7 @@
         </p:nvSpPr>
         <p:spPr>
           <a:xfrm>
-            <a:off x="8016220" y="2110290"/>
+            <a:off x="8016220" y="2240274"/>
             <a:ext cx="2331714" cy="228599"/>
           </a:xfrm>
           <a:prstGeom prst="rect">
@@ -21774,7 +21774,7 @@
         </p:nvSpPr>
         <p:spPr>
           <a:xfrm>
-            <a:off x="8016220" y="2354129"/>
+            <a:off x="8016220" y="2484114"/>
             <a:ext cx="3419847" cy="228599"/>
           </a:xfrm>
           <a:prstGeom prst="rect">
@@ -21788,7 +21788,7 @@
           <a:p>
             <a:pPr algn="l">
               <a:lnSpc>
-                <a:spcPts val="1700"/>
+                <a:spcPts val="1710"/>
               </a:lnSpc>
               <a:buNone/>
             </a:pPr>
@@ -21820,7 +21820,7 @@
         </p:blipFill>
         <p:spPr>
           <a:xfrm>
-            <a:off x="8016220" y="2662119"/>
+            <a:off x="8016220" y="2792103"/>
             <a:ext cx="227837" cy="227837"/>
           </a:xfrm>
           <a:prstGeom prst="rect">
@@ -21836,7 +21836,7 @@
         </p:nvSpPr>
         <p:spPr>
           <a:xfrm>
-            <a:off x="8435929" y="2628449"/>
+            <a:off x="8435929" y="2758433"/>
             <a:ext cx="2914021" cy="228599"/>
           </a:xfrm>
           <a:prstGeom prst="rect">
@@ -21882,7 +21882,7 @@
         </p:blipFill>
         <p:spPr>
           <a:xfrm>
-            <a:off x="8016220" y="3426443"/>
+            <a:off x="8016220" y="3523931"/>
             <a:ext cx="227837" cy="227837"/>
           </a:xfrm>
           <a:prstGeom prst="rect">
@@ -21898,7 +21898,7 @@
         </p:nvSpPr>
         <p:spPr>
           <a:xfrm>
-            <a:off x="8435929" y="3392773"/>
+            <a:off x="8435929" y="3490261"/>
             <a:ext cx="2914021" cy="228599"/>
           </a:xfrm>
           <a:prstGeom prst="rect">
@@ -21944,7 +21944,7 @@
         </p:blipFill>
         <p:spPr>
           <a:xfrm>
-            <a:off x="8016220" y="4190767"/>
+            <a:off x="8016220" y="4255759"/>
             <a:ext cx="227837" cy="227837"/>
           </a:xfrm>
           <a:prstGeom prst="rect">
@@ -21960,7 +21960,7 @@
         </p:nvSpPr>
         <p:spPr>
           <a:xfrm>
-            <a:off x="8435929" y="4157097"/>
+            <a:off x="8435929" y="4222089"/>
             <a:ext cx="2914021" cy="228599"/>
           </a:xfrm>
           <a:prstGeom prst="rect">
@@ -22006,7 +22006,7 @@
         </p:blipFill>
         <p:spPr>
           <a:xfrm>
-            <a:off x="8016220" y="4955091"/>
+            <a:off x="8016220" y="4987587"/>
             <a:ext cx="227837" cy="227837"/>
           </a:xfrm>
           <a:prstGeom prst="rect">
@@ -22022,7 +22022,7 @@
         </p:nvSpPr>
         <p:spPr>
           <a:xfrm>
-            <a:off x="8435929" y="4921421"/>
+            <a:off x="8435929" y="4953917"/>
             <a:ext cx="2914021" cy="228599"/>
           </a:xfrm>
           <a:prstGeom prst="rect">
@@ -23878,7 +23878,7 @@
               <a:t>02</a:t>
             </a:r>
             <a:r>
-              <a:rPr sz="900" b="1" i="0" spc="203">
+              <a:rPr sz="1050" b="1" i="0" spc="203">
                 <a:solidFill>
                   <a:srgbClr val="5F7E97"/>
                 </a:solidFill>
@@ -23897,7 +23897,7 @@
         </p:nvSpPr>
         <p:spPr>
           <a:xfrm>
-            <a:off x="792478" y="579119"/>
+            <a:off x="792478" y="563879"/>
             <a:ext cx="9870923" cy="228599"/>
           </a:xfrm>
           <a:prstGeom prst="rect">
@@ -23911,7 +23911,7 @@
           <a:p>
             <a:pPr algn="l">
               <a:lnSpc>
-                <a:spcPts val="7400"/>
+                <a:spcPts val="8030"/>
               </a:lnSpc>
               <a:buNone/>
             </a:pPr>
@@ -23935,7 +23935,7 @@
         </p:nvSpPr>
         <p:spPr>
           <a:xfrm>
-            <a:off x="792478" y="1625513"/>
+            <a:off x="792478" y="1706060"/>
             <a:ext cx="9171409" cy="228599"/>
           </a:xfrm>
           <a:prstGeom prst="rect">
@@ -23987,12 +23987,12 @@
           <a:p>
             <a:pPr algn="r">
               <a:lnSpc>
-                <a:spcPts val="1380"/>
+                <a:spcPts val="1730"/>
               </a:lnSpc>
               <a:buNone/>
             </a:pPr>
             <a:r>
-              <a:rPr sz="850" b="1" i="0" spc="109">
+              <a:rPr sz="1050" b="1" i="0" spc="109">
                 <a:solidFill>
                   <a:srgbClr val="8FA9BC"/>
                 </a:solidFill>
@@ -24025,12 +24025,12 @@
           <a:p>
             <a:pPr algn="r">
               <a:lnSpc>
-                <a:spcPts val="1660"/>
+                <a:spcPts val="1730"/>
               </a:lnSpc>
               <a:buNone/>
             </a:pPr>
             <a:r>
-              <a:rPr sz="1000" b="1" i="0" spc="156">
+              <a:rPr sz="1050" b="1" i="0" spc="156">
                 <a:solidFill>
                   <a:srgbClr val="8FA9BC"/>
                 </a:solidFill>
@@ -24057,7 +24057,7 @@
         </p:blipFill>
         <p:spPr>
           <a:xfrm>
-            <a:off x="792478" y="2200478"/>
+            <a:off x="792478" y="2330462"/>
             <a:ext cx="257555" cy="257555"/>
           </a:xfrm>
           <a:prstGeom prst="rect">
@@ -24073,7 +24073,7 @@
         </p:nvSpPr>
         <p:spPr>
           <a:xfrm>
-            <a:off x="1236875" y="2156010"/>
+            <a:off x="1236875" y="2285994"/>
             <a:ext cx="6541857" cy="228599"/>
           </a:xfrm>
           <a:prstGeom prst="rect">
@@ -24119,7 +24119,7 @@
         </p:blipFill>
         <p:spPr>
           <a:xfrm>
-            <a:off x="792478" y="3311438"/>
+            <a:off x="792478" y="3398094"/>
             <a:ext cx="257555" cy="257555"/>
           </a:xfrm>
           <a:prstGeom prst="rect">
@@ -24135,7 +24135,7 @@
         </p:nvSpPr>
         <p:spPr>
           <a:xfrm>
-            <a:off x="1236875" y="3266970"/>
+            <a:off x="1236875" y="3353626"/>
             <a:ext cx="6541857" cy="228599"/>
           </a:xfrm>
           <a:prstGeom prst="rect">
@@ -24181,7 +24181,7 @@
         </p:blipFill>
         <p:spPr>
           <a:xfrm>
-            <a:off x="792478" y="4422398"/>
+            <a:off x="792478" y="4465726"/>
             <a:ext cx="257555" cy="257555"/>
           </a:xfrm>
           <a:prstGeom prst="rect">
@@ -24197,7 +24197,7 @@
         </p:nvSpPr>
         <p:spPr>
           <a:xfrm>
-            <a:off x="1236875" y="4377930"/>
+            <a:off x="1236875" y="4421258"/>
             <a:ext cx="6541857" cy="228599"/>
           </a:xfrm>
           <a:prstGeom prst="rect">
@@ -24974,7 +24974,7 @@
               <a:t>20</a:t>
             </a:r>
             <a:r>
-              <a:rPr sz="900" b="1" i="0" spc="203">
+              <a:rPr sz="1050" b="1" i="0" spc="203">
                 <a:solidFill>
                   <a:srgbClr val="5F7E97"/>
                 </a:solidFill>
@@ -24993,7 +24993,7 @@
         </p:nvSpPr>
         <p:spPr>
           <a:xfrm>
-            <a:off x="792478" y="579119"/>
+            <a:off x="792478" y="563879"/>
             <a:ext cx="9870923" cy="228599"/>
           </a:xfrm>
           <a:prstGeom prst="rect">
@@ -25007,7 +25007,7 @@
           <a:p>
             <a:pPr algn="l">
               <a:lnSpc>
-                <a:spcPts val="7400"/>
+                <a:spcPts val="8030"/>
               </a:lnSpc>
               <a:buNone/>
             </a:pPr>
@@ -25031,7 +25031,7 @@
         </p:nvSpPr>
         <p:spPr>
           <a:xfrm>
-            <a:off x="792478" y="1625513"/>
+            <a:off x="792478" y="1706060"/>
             <a:ext cx="9171409" cy="228599"/>
           </a:xfrm>
           <a:prstGeom prst="rect">
@@ -25083,12 +25083,12 @@
           <a:p>
             <a:pPr algn="r">
               <a:lnSpc>
-                <a:spcPts val="1380"/>
+                <a:spcPts val="1730"/>
               </a:lnSpc>
               <a:buNone/>
             </a:pPr>
             <a:r>
-              <a:rPr sz="850" b="1" i="0" spc="109">
+              <a:rPr sz="1050" b="1" i="0" spc="109">
                 <a:solidFill>
                   <a:srgbClr val="8FA9BC"/>
                 </a:solidFill>
@@ -25121,12 +25121,12 @@
           <a:p>
             <a:pPr algn="r">
               <a:lnSpc>
-                <a:spcPts val="1660"/>
+                <a:spcPts val="1730"/>
               </a:lnSpc>
               <a:buNone/>
             </a:pPr>
             <a:r>
-              <a:rPr sz="1000" b="1" i="0" spc="156">
+              <a:rPr sz="1050" b="1" i="0" spc="156">
                 <a:solidFill>
                   <a:srgbClr val="8FA9BC"/>
                 </a:solidFill>
@@ -25145,7 +25145,7 @@
         </p:nvSpPr>
         <p:spPr>
           <a:xfrm>
-            <a:off x="792478" y="2156010"/>
+            <a:off x="792478" y="2362756"/>
             <a:ext cx="5907009" cy="228599"/>
           </a:xfrm>
           <a:prstGeom prst="rect">
@@ -25159,12 +25159,12 @@
           <a:p>
             <a:pPr algn="l">
               <a:lnSpc>
-                <a:spcPts val="1660"/>
+                <a:spcPts val="1730"/>
               </a:lnSpc>
               <a:buNone/>
             </a:pPr>
             <a:r>
-              <a:rPr sz="1000" b="1" i="0" spc="203">
+              <a:rPr sz="1050" b="1" i="0" spc="203">
                 <a:solidFill>
                   <a:srgbClr val="4595C2"/>
                 </a:solidFill>
@@ -25183,7 +25183,7 @@
         </p:nvSpPr>
         <p:spPr>
           <a:xfrm>
-            <a:off x="6126465" y="2156010"/>
+            <a:off x="6126465" y="2362756"/>
             <a:ext cx="4352533" cy="228599"/>
           </a:xfrm>
           <a:prstGeom prst="rect">
@@ -25197,12 +25197,12 @@
           <a:p>
             <a:pPr algn="l">
               <a:lnSpc>
-                <a:spcPts val="1660"/>
+                <a:spcPts val="1730"/>
               </a:lnSpc>
               <a:buNone/>
             </a:pPr>
             <a:r>
-              <a:rPr sz="1000" b="1" i="0" spc="203">
+              <a:rPr sz="1050" b="1" i="0" spc="203">
                 <a:solidFill>
                   <a:srgbClr val="4595C2"/>
                 </a:solidFill>
@@ -25229,7 +25229,7 @@
         </p:blipFill>
         <p:spPr>
           <a:xfrm>
-            <a:off x="792478" y="2445585"/>
+            <a:off x="792478" y="2652331"/>
             <a:ext cx="247649" cy="247649"/>
           </a:xfrm>
           <a:prstGeom prst="rect">
@@ -25245,7 +25245,7 @@
         </p:nvSpPr>
         <p:spPr>
           <a:xfrm>
-            <a:off x="1212187" y="2415089"/>
+            <a:off x="1212187" y="2621835"/>
             <a:ext cx="4235326" cy="228599"/>
           </a:xfrm>
           <a:prstGeom prst="rect">
@@ -25291,7 +25291,7 @@
         </p:blipFill>
         <p:spPr>
           <a:xfrm>
-            <a:off x="792478" y="2922170"/>
+            <a:off x="792478" y="3409591"/>
             <a:ext cx="247649" cy="247649"/>
           </a:xfrm>
           <a:prstGeom prst="rect">
@@ -25307,7 +25307,7 @@
         </p:nvSpPr>
         <p:spPr>
           <a:xfrm>
-            <a:off x="1212187" y="2891674"/>
+            <a:off x="1212187" y="3379095"/>
             <a:ext cx="4235326" cy="228599"/>
           </a:xfrm>
           <a:prstGeom prst="rect">
@@ -25353,7 +25353,7 @@
         </p:blipFill>
         <p:spPr>
           <a:xfrm>
-            <a:off x="792478" y="3398755"/>
+            <a:off x="792478" y="4166851"/>
             <a:ext cx="247649" cy="247649"/>
           </a:xfrm>
           <a:prstGeom prst="rect">
@@ -25369,7 +25369,7 @@
         </p:nvSpPr>
         <p:spPr>
           <a:xfrm>
-            <a:off x="1212187" y="3368260"/>
+            <a:off x="1212187" y="4136356"/>
             <a:ext cx="4235326" cy="228599"/>
           </a:xfrm>
           <a:prstGeom prst="rect">
@@ -25415,7 +25415,7 @@
         </p:blipFill>
         <p:spPr>
           <a:xfrm>
-            <a:off x="792478" y="3875341"/>
+            <a:off x="792478" y="4924111"/>
             <a:ext cx="247649" cy="247649"/>
           </a:xfrm>
           <a:prstGeom prst="rect">
@@ -25431,7 +25431,7 @@
         </p:nvSpPr>
         <p:spPr>
           <a:xfrm>
-            <a:off x="1212187" y="3844845"/>
+            <a:off x="1212187" y="4893616"/>
             <a:ext cx="4235326" cy="228599"/>
           </a:xfrm>
           <a:prstGeom prst="rect">
@@ -25477,7 +25477,7 @@
         </p:blipFill>
         <p:spPr>
           <a:xfrm>
-            <a:off x="792478" y="4351926"/>
+            <a:off x="792478" y="5681372"/>
             <a:ext cx="247649" cy="247649"/>
           </a:xfrm>
           <a:prstGeom prst="rect">
@@ -25493,7 +25493,7 @@
         </p:nvSpPr>
         <p:spPr>
           <a:xfrm>
-            <a:off x="1212187" y="4321430"/>
+            <a:off x="1212187" y="5650876"/>
             <a:ext cx="4235326" cy="228599"/>
           </a:xfrm>
           <a:prstGeom prst="rect">
@@ -25539,7 +25539,7 @@
         </p:blipFill>
         <p:spPr>
           <a:xfrm>
-            <a:off x="6126465" y="2445585"/>
+            <a:off x="6126465" y="2652331"/>
             <a:ext cx="247649" cy="247649"/>
           </a:xfrm>
           <a:prstGeom prst="rect">
@@ -25555,7 +25555,7 @@
         </p:nvSpPr>
         <p:spPr>
           <a:xfrm>
-            <a:off x="6546173" y="2415089"/>
+            <a:off x="6546173" y="2621835"/>
             <a:ext cx="4390773" cy="228599"/>
           </a:xfrm>
           <a:prstGeom prst="rect">
@@ -25601,7 +25601,7 @@
         </p:blipFill>
         <p:spPr>
           <a:xfrm>
-            <a:off x="6126465" y="2922170"/>
+            <a:off x="6126465" y="3409591"/>
             <a:ext cx="247649" cy="247649"/>
           </a:xfrm>
           <a:prstGeom prst="rect">
@@ -25617,7 +25617,7 @@
         </p:nvSpPr>
         <p:spPr>
           <a:xfrm>
-            <a:off x="6546173" y="2891674"/>
+            <a:off x="6546173" y="3379095"/>
             <a:ext cx="4390773" cy="228599"/>
           </a:xfrm>
           <a:prstGeom prst="rect">
@@ -25663,7 +25663,7 @@
         </p:blipFill>
         <p:spPr>
           <a:xfrm>
-            <a:off x="6126465" y="3398755"/>
+            <a:off x="6126465" y="4166851"/>
             <a:ext cx="247649" cy="247649"/>
           </a:xfrm>
           <a:prstGeom prst="rect">
@@ -25679,7 +25679,7 @@
         </p:nvSpPr>
         <p:spPr>
           <a:xfrm>
-            <a:off x="6546173" y="3368260"/>
+            <a:off x="6546173" y="4136356"/>
             <a:ext cx="4390773" cy="228599"/>
           </a:xfrm>
           <a:prstGeom prst="rect">
@@ -25725,7 +25725,7 @@
         </p:blipFill>
         <p:spPr>
           <a:xfrm>
-            <a:off x="6126465" y="3875341"/>
+            <a:off x="6126465" y="4924111"/>
             <a:ext cx="247649" cy="247649"/>
           </a:xfrm>
           <a:prstGeom prst="rect">
@@ -25741,7 +25741,7 @@
         </p:nvSpPr>
         <p:spPr>
           <a:xfrm>
-            <a:off x="6546173" y="3844845"/>
+            <a:off x="6546173" y="4893616"/>
             <a:ext cx="4390773" cy="228599"/>
           </a:xfrm>
           <a:prstGeom prst="rect">
@@ -25787,7 +25787,7 @@
         </p:blipFill>
         <p:spPr>
           <a:xfrm>
-            <a:off x="6126465" y="4351926"/>
+            <a:off x="6126465" y="5681372"/>
             <a:ext cx="247649" cy="247649"/>
           </a:xfrm>
           <a:prstGeom prst="rect">
@@ -25803,7 +25803,7 @@
         </p:nvSpPr>
         <p:spPr>
           <a:xfrm>
-            <a:off x="6546173" y="4321430"/>
+            <a:off x="6546173" y="5650876"/>
             <a:ext cx="4390773" cy="228599"/>
           </a:xfrm>
           <a:prstGeom prst="rect">
@@ -27068,7 +27068,7 @@
               <a:t>21</a:t>
             </a:r>
             <a:r>
-              <a:rPr sz="900" b="1" i="0" spc="203">
+              <a:rPr sz="1050" b="1" i="0" spc="203">
                 <a:solidFill>
                   <a:srgbClr val="D8EBF7"/>
                 </a:solidFill>
@@ -27087,7 +27087,7 @@
         </p:nvSpPr>
         <p:spPr>
           <a:xfrm>
-            <a:off x="792478" y="579119"/>
+            <a:off x="792478" y="563879"/>
             <a:ext cx="9870923" cy="228599"/>
           </a:xfrm>
           <a:prstGeom prst="rect">
@@ -27101,7 +27101,7 @@
           <a:p>
             <a:pPr algn="l">
               <a:lnSpc>
-                <a:spcPts val="7400"/>
+                <a:spcPts val="8030"/>
               </a:lnSpc>
               <a:buNone/>
             </a:pPr>
@@ -27125,7 +27125,7 @@
         </p:nvSpPr>
         <p:spPr>
           <a:xfrm>
-            <a:off x="792478" y="1625513"/>
+            <a:off x="792478" y="1706060"/>
             <a:ext cx="9171409" cy="228599"/>
           </a:xfrm>
           <a:prstGeom prst="rect">
@@ -27177,12 +27177,12 @@
           <a:p>
             <a:pPr algn="r">
               <a:lnSpc>
-                <a:spcPts val="1380"/>
+                <a:spcPts val="1730"/>
               </a:lnSpc>
               <a:buNone/>
             </a:pPr>
             <a:r>
-              <a:rPr sz="850" b="1" i="0" spc="109">
+              <a:rPr sz="1050" b="1" i="0" spc="109">
                 <a:solidFill>
                   <a:srgbClr val="B7D6E9"/>
                 </a:solidFill>
@@ -27215,12 +27215,12 @@
           <a:p>
             <a:pPr algn="r">
               <a:lnSpc>
-                <a:spcPts val="1660"/>
+                <a:spcPts val="1730"/>
               </a:lnSpc>
               <a:buNone/>
             </a:pPr>
             <a:r>
-              <a:rPr sz="1000" b="1" i="0" spc="156">
+              <a:rPr sz="1050" b="1" i="0" spc="156">
                 <a:solidFill>
                   <a:srgbClr val="B7D6E9"/>
                 </a:solidFill>
@@ -27247,7 +27247,7 @@
         </p:blipFill>
         <p:spPr>
           <a:xfrm>
-            <a:off x="792478" y="2335675"/>
+            <a:off x="792478" y="2428930"/>
             <a:ext cx="257555" cy="257555"/>
           </a:xfrm>
           <a:prstGeom prst="rect">
@@ -27263,7 +27263,7 @@
         </p:nvSpPr>
         <p:spPr>
           <a:xfrm>
-            <a:off x="1203957" y="2232210"/>
+            <a:off x="1203957" y="2325465"/>
             <a:ext cx="5440666" cy="228599"/>
           </a:xfrm>
           <a:prstGeom prst="rect">
@@ -27309,7 +27309,7 @@
         </p:blipFill>
         <p:spPr>
           <a:xfrm>
-            <a:off x="792478" y="2984564"/>
+            <a:off x="792478" y="3270251"/>
             <a:ext cx="257555" cy="257555"/>
           </a:xfrm>
           <a:prstGeom prst="rect">
@@ -27325,7 +27325,7 @@
         </p:nvSpPr>
         <p:spPr>
           <a:xfrm>
-            <a:off x="1203957" y="2881099"/>
+            <a:off x="1203957" y="3166786"/>
             <a:ext cx="5440666" cy="228599"/>
           </a:xfrm>
           <a:prstGeom prst="rect">
@@ -27371,7 +27371,7 @@
         </p:blipFill>
         <p:spPr>
           <a:xfrm>
-            <a:off x="792478" y="3633453"/>
+            <a:off x="792478" y="4111571"/>
             <a:ext cx="257555" cy="257555"/>
           </a:xfrm>
           <a:prstGeom prst="rect">
@@ -27387,7 +27387,7 @@
         </p:nvSpPr>
         <p:spPr>
           <a:xfrm>
-            <a:off x="1203957" y="3529988"/>
+            <a:off x="1203957" y="4008106"/>
             <a:ext cx="5440666" cy="228599"/>
           </a:xfrm>
           <a:prstGeom prst="rect">
@@ -27433,7 +27433,7 @@
         </p:blipFill>
         <p:spPr>
           <a:xfrm>
-            <a:off x="792478" y="4282342"/>
+            <a:off x="792478" y="4952892"/>
             <a:ext cx="257555" cy="257555"/>
           </a:xfrm>
           <a:prstGeom prst="rect">
@@ -27449,7 +27449,7 @@
         </p:nvSpPr>
         <p:spPr>
           <a:xfrm>
-            <a:off x="1203957" y="4178877"/>
+            <a:off x="1203957" y="4849427"/>
             <a:ext cx="5440666" cy="228599"/>
           </a:xfrm>
           <a:prstGeom prst="rect">
@@ -27495,7 +27495,7 @@
         </p:blipFill>
         <p:spPr>
           <a:xfrm>
-            <a:off x="792478" y="4939327"/>
+            <a:off x="792478" y="5609877"/>
             <a:ext cx="336803" cy="336803"/>
           </a:xfrm>
           <a:prstGeom prst="rect">
@@ -27511,7 +27511,7 @@
         </p:nvSpPr>
         <p:spPr>
           <a:xfrm>
-            <a:off x="1203957" y="4827766"/>
+            <a:off x="1203957" y="5498316"/>
             <a:ext cx="5440666" cy="228599"/>
           </a:xfrm>
           <a:prstGeom prst="rect">
@@ -27549,7 +27549,7 @@
         </p:nvSpPr>
         <p:spPr>
           <a:xfrm>
-            <a:off x="7498061" y="3603806"/>
+            <a:off x="7498061" y="4731555"/>
             <a:ext cx="4041638" cy="228599"/>
           </a:xfrm>
           <a:prstGeom prst="rect">
@@ -27563,14 +27563,14 @@
           <a:p>
             <a:pPr algn="l">
               <a:lnSpc>
-                <a:spcPts val="2810"/>
+                <a:spcPts val="2990"/>
               </a:lnSpc>
               <a:buNone/>
             </a:pPr>
             <a:r>
-              <a:rPr sz="1600" b="0" i="0">
+              <a:rPr sz="1650" b="0" i="0">
                 <a:solidFill>
-                  <a:srgbClr val="D8EBF7"/>
+                  <a:srgbClr val="FFFFFF"/>
                 </a:solidFill>
                 <a:latin typeface="Raleway"/>
               </a:rPr>
@@ -28517,7 +28517,7 @@
               <a:t>22</a:t>
             </a:r>
             <a:r>
-              <a:rPr sz="900" b="1" i="0" spc="203">
+              <a:rPr sz="1050" b="1" i="0" spc="203">
                 <a:solidFill>
                   <a:srgbClr val="5F7E97"/>
                 </a:solidFill>
@@ -28536,7 +28536,7 @@
         </p:nvSpPr>
         <p:spPr>
           <a:xfrm>
-            <a:off x="792478" y="579119"/>
+            <a:off x="792478" y="563879"/>
             <a:ext cx="9870923" cy="228599"/>
           </a:xfrm>
           <a:prstGeom prst="rect">
@@ -28550,7 +28550,7 @@
           <a:p>
             <a:pPr algn="l">
               <a:lnSpc>
-                <a:spcPts val="7400"/>
+                <a:spcPts val="8030"/>
               </a:lnSpc>
               <a:buNone/>
             </a:pPr>
@@ -28588,12 +28588,12 @@
           <a:p>
             <a:pPr algn="r">
               <a:lnSpc>
-                <a:spcPts val="1380"/>
+                <a:spcPts val="1730"/>
               </a:lnSpc>
               <a:buNone/>
             </a:pPr>
             <a:r>
-              <a:rPr sz="850" b="1" i="0" spc="109">
+              <a:rPr sz="1050" b="1" i="0" spc="109">
                 <a:solidFill>
                   <a:srgbClr val="8FA9BC"/>
                 </a:solidFill>
@@ -28626,12 +28626,12 @@
           <a:p>
             <a:pPr algn="r">
               <a:lnSpc>
-                <a:spcPts val="1660"/>
+                <a:spcPts val="1730"/>
               </a:lnSpc>
               <a:buNone/>
             </a:pPr>
             <a:r>
-              <a:rPr sz="1000" b="1" i="0" spc="156">
+              <a:rPr sz="1050" b="1" i="0" spc="156">
                 <a:solidFill>
                   <a:srgbClr val="8FA9BC"/>
                 </a:solidFill>
@@ -28658,7 +28658,7 @@
         </p:blipFill>
         <p:spPr>
           <a:xfrm>
-            <a:off x="792478" y="1699822"/>
+            <a:off x="792478" y="2238384"/>
             <a:ext cx="217931" cy="217931"/>
           </a:xfrm>
           <a:prstGeom prst="rect">
@@ -28674,7 +28674,7 @@
         </p:nvSpPr>
         <p:spPr>
           <a:xfrm>
-            <a:off x="1187498" y="1671233"/>
+            <a:off x="1187498" y="2209794"/>
             <a:ext cx="9234832" cy="228599"/>
           </a:xfrm>
           <a:prstGeom prst="rect">
@@ -28720,7 +28720,7 @@
         </p:blipFill>
         <p:spPr>
           <a:xfrm>
-            <a:off x="792478" y="2425498"/>
+            <a:off x="792478" y="2856347"/>
             <a:ext cx="217931" cy="217931"/>
           </a:xfrm>
           <a:prstGeom prst="rect">
@@ -28736,7 +28736,7 @@
         </p:nvSpPr>
         <p:spPr>
           <a:xfrm>
-            <a:off x="1187498" y="2396909"/>
+            <a:off x="1187498" y="2827758"/>
             <a:ext cx="9234832" cy="228599"/>
           </a:xfrm>
           <a:prstGeom prst="rect">
@@ -28782,7 +28782,7 @@
         </p:blipFill>
         <p:spPr>
           <a:xfrm>
-            <a:off x="792478" y="3151174"/>
+            <a:off x="792478" y="3474310"/>
             <a:ext cx="217931" cy="217931"/>
           </a:xfrm>
           <a:prstGeom prst="rect">
@@ -28798,7 +28798,7 @@
         </p:nvSpPr>
         <p:spPr>
           <a:xfrm>
-            <a:off x="1187498" y="3122585"/>
+            <a:off x="1187498" y="3445721"/>
             <a:ext cx="9234832" cy="228599"/>
           </a:xfrm>
           <a:prstGeom prst="rect">
@@ -28844,7 +28844,7 @@
         </p:blipFill>
         <p:spPr>
           <a:xfrm>
-            <a:off x="792478" y="3876849"/>
+            <a:off x="792478" y="4092274"/>
             <a:ext cx="217931" cy="217931"/>
           </a:xfrm>
           <a:prstGeom prst="rect">
@@ -28860,7 +28860,7 @@
         </p:nvSpPr>
         <p:spPr>
           <a:xfrm>
-            <a:off x="1187498" y="3848260"/>
+            <a:off x="1187498" y="4063685"/>
             <a:ext cx="9234832" cy="228599"/>
           </a:xfrm>
           <a:prstGeom prst="rect">
@@ -28906,7 +28906,7 @@
         </p:blipFill>
         <p:spPr>
           <a:xfrm>
-            <a:off x="792478" y="4842583"/>
+            <a:off x="792478" y="4950295"/>
             <a:ext cx="217931" cy="217931"/>
           </a:xfrm>
           <a:prstGeom prst="rect">
@@ -28922,7 +28922,7 @@
         </p:nvSpPr>
         <p:spPr>
           <a:xfrm>
-            <a:off x="1187498" y="4813994"/>
+            <a:off x="1187498" y="4921706"/>
             <a:ext cx="9234832" cy="228599"/>
           </a:xfrm>
           <a:prstGeom prst="rect">
@@ -29824,7 +29824,7 @@
               <a:t>03</a:t>
             </a:r>
             <a:r>
-              <a:rPr sz="900" b="1" i="0" spc="203">
+              <a:rPr sz="1050" b="1" i="0" spc="203">
                 <a:solidFill>
                   <a:srgbClr val="5F7E97"/>
                 </a:solidFill>
@@ -29843,7 +29843,7 @@
         </p:nvSpPr>
         <p:spPr>
           <a:xfrm>
-            <a:off x="792478" y="579119"/>
+            <a:off x="792478" y="563879"/>
             <a:ext cx="9870923" cy="228599"/>
           </a:xfrm>
           <a:prstGeom prst="rect">
@@ -29857,12 +29857,12 @@
           <a:p>
             <a:pPr algn="l">
               <a:lnSpc>
-                <a:spcPts val="7400"/>
+                <a:spcPts val="7200"/>
               </a:lnSpc>
               <a:buNone/>
             </a:pPr>
             <a:r>
-              <a:rPr sz="5650" b="1" i="0">
+              <a:rPr sz="5050" b="1" i="0">
                 <a:solidFill>
                   <a:srgbClr val="4595C2"/>
                 </a:solidFill>
@@ -29881,7 +29881,7 @@
         </p:nvSpPr>
         <p:spPr>
           <a:xfrm>
-            <a:off x="792478" y="2565228"/>
+            <a:off x="792478" y="1600516"/>
             <a:ext cx="9171409" cy="228599"/>
           </a:xfrm>
           <a:prstGeom prst="rect">
@@ -29933,12 +29933,12 @@
           <a:p>
             <a:pPr algn="r">
               <a:lnSpc>
-                <a:spcPts val="1380"/>
+                <a:spcPts val="1730"/>
               </a:lnSpc>
               <a:buNone/>
             </a:pPr>
             <a:r>
-              <a:rPr sz="850" b="1" i="0" spc="109">
+              <a:rPr sz="1050" b="1" i="0" spc="109">
                 <a:solidFill>
                   <a:srgbClr val="8FA9BC"/>
                 </a:solidFill>
@@ -29971,12 +29971,12 @@
           <a:p>
             <a:pPr algn="r">
               <a:lnSpc>
-                <a:spcPts val="1660"/>
+                <a:spcPts val="1730"/>
               </a:lnSpc>
               <a:buNone/>
             </a:pPr>
             <a:r>
-              <a:rPr sz="1000" b="1" i="0" spc="156">
+              <a:rPr sz="1050" b="1" i="0" spc="156">
                 <a:solidFill>
                   <a:srgbClr val="8FA9BC"/>
                 </a:solidFill>
@@ -30003,7 +30003,7 @@
         </p:blipFill>
         <p:spPr>
           <a:xfrm>
-            <a:off x="792478" y="3139557"/>
+            <a:off x="792478" y="2679894"/>
             <a:ext cx="247649" cy="247649"/>
           </a:xfrm>
           <a:prstGeom prst="rect">
@@ -30019,7 +30019,7 @@
         </p:nvSpPr>
         <p:spPr>
           <a:xfrm>
-            <a:off x="1212187" y="3095725"/>
+            <a:off x="1212187" y="2636061"/>
             <a:ext cx="8743306" cy="228599"/>
           </a:xfrm>
           <a:prstGeom prst="rect">
@@ -30065,7 +30065,7 @@
         </p:blipFill>
         <p:spPr>
           <a:xfrm>
-            <a:off x="792478" y="3679849"/>
+            <a:off x="792478" y="3220185"/>
             <a:ext cx="247649" cy="247649"/>
           </a:xfrm>
           <a:prstGeom prst="rect">
@@ -30081,7 +30081,7 @@
         </p:nvSpPr>
         <p:spPr>
           <a:xfrm>
-            <a:off x="1212187" y="3636016"/>
+            <a:off x="1212187" y="3176353"/>
             <a:ext cx="8743306" cy="228599"/>
           </a:xfrm>
           <a:prstGeom prst="rect">
@@ -30119,7 +30119,7 @@
         </p:nvSpPr>
         <p:spPr>
           <a:xfrm>
-            <a:off x="792478" y="4158020"/>
+            <a:off x="792478" y="3698356"/>
             <a:ext cx="5907009" cy="228599"/>
           </a:xfrm>
           <a:prstGeom prst="rect">
@@ -30133,12 +30133,12 @@
           <a:p>
             <a:pPr algn="l">
               <a:lnSpc>
-                <a:spcPts val="1660"/>
+                <a:spcPts val="1730"/>
               </a:lnSpc>
               <a:buNone/>
             </a:pPr>
             <a:r>
-              <a:rPr sz="1000" b="1" i="0" spc="203">
+              <a:rPr sz="1050" b="1" i="0" spc="203">
                 <a:solidFill>
                   <a:srgbClr val="4595C2"/>
                 </a:solidFill>
@@ -30165,7 +30165,7 @@
         </p:blipFill>
         <p:spPr>
           <a:xfrm>
-            <a:off x="792478" y="4439975"/>
+            <a:off x="792478" y="3980311"/>
             <a:ext cx="227837" cy="227837"/>
           </a:xfrm>
           <a:prstGeom prst="rect">
@@ -30181,7 +30181,7 @@
         </p:nvSpPr>
         <p:spPr>
           <a:xfrm>
-            <a:off x="1187498" y="4401859"/>
+            <a:off x="1187498" y="3942196"/>
             <a:ext cx="2550584" cy="228599"/>
           </a:xfrm>
           <a:prstGeom prst="rect">
@@ -30227,7 +30227,7 @@
         </p:blipFill>
         <p:spPr>
           <a:xfrm>
-            <a:off x="3840470" y="4439975"/>
+            <a:off x="3840470" y="3980311"/>
             <a:ext cx="227837" cy="227837"/>
           </a:xfrm>
           <a:prstGeom prst="rect">
@@ -30243,7 +30243,7 @@
         </p:nvSpPr>
         <p:spPr>
           <a:xfrm>
-            <a:off x="4235490" y="4401859"/>
+            <a:off x="4235490" y="3942196"/>
             <a:ext cx="2550584" cy="228599"/>
           </a:xfrm>
           <a:prstGeom prst="rect">
@@ -30289,7 +30289,7 @@
         </p:blipFill>
         <p:spPr>
           <a:xfrm>
-            <a:off x="6888463" y="4439975"/>
+            <a:off x="6888463" y="3980311"/>
             <a:ext cx="227837" cy="227837"/>
           </a:xfrm>
           <a:prstGeom prst="rect">
@@ -30305,7 +30305,7 @@
         </p:nvSpPr>
         <p:spPr>
           <a:xfrm>
-            <a:off x="7283483" y="4401859"/>
+            <a:off x="7283483" y="3942196"/>
             <a:ext cx="2550584" cy="228599"/>
           </a:xfrm>
           <a:prstGeom prst="rect">
@@ -30351,7 +30351,7 @@
         </p:blipFill>
         <p:spPr>
           <a:xfrm>
-            <a:off x="792478" y="4828626"/>
+            <a:off x="792478" y="4368962"/>
             <a:ext cx="227837" cy="227837"/>
           </a:xfrm>
           <a:prstGeom prst="rect">
@@ -30367,7 +30367,7 @@
         </p:nvSpPr>
         <p:spPr>
           <a:xfrm>
-            <a:off x="1187498" y="4790510"/>
+            <a:off x="1187498" y="4330846"/>
             <a:ext cx="2550584" cy="228599"/>
           </a:xfrm>
           <a:prstGeom prst="rect">
@@ -30413,7 +30413,7 @@
         </p:blipFill>
         <p:spPr>
           <a:xfrm>
-            <a:off x="3840470" y="4828626"/>
+            <a:off x="3840470" y="4368962"/>
             <a:ext cx="227837" cy="227837"/>
           </a:xfrm>
           <a:prstGeom prst="rect">
@@ -30429,7 +30429,7 @@
         </p:nvSpPr>
         <p:spPr>
           <a:xfrm>
-            <a:off x="4235490" y="4790510"/>
+            <a:off x="4235490" y="4330846"/>
             <a:ext cx="2550584" cy="228599"/>
           </a:xfrm>
           <a:prstGeom prst="rect">
@@ -30467,7 +30467,7 @@
         </p:nvSpPr>
         <p:spPr>
           <a:xfrm>
-            <a:off x="792478" y="5377280"/>
+            <a:off x="792478" y="4917616"/>
             <a:ext cx="5907009" cy="228599"/>
           </a:xfrm>
           <a:prstGeom prst="rect">
@@ -30481,12 +30481,12 @@
           <a:p>
             <a:pPr algn="l">
               <a:lnSpc>
-                <a:spcPts val="1660"/>
+                <a:spcPts val="1730"/>
               </a:lnSpc>
               <a:buNone/>
             </a:pPr>
             <a:r>
-              <a:rPr sz="1000" b="1" i="0" spc="203">
+              <a:rPr sz="1050" b="1" i="0" spc="203">
                 <a:solidFill>
                   <a:srgbClr val="4595C2"/>
                 </a:solidFill>
@@ -30505,7 +30505,7 @@
         </p:nvSpPr>
         <p:spPr>
           <a:xfrm>
-            <a:off x="731518" y="5621119"/>
+            <a:off x="731518" y="5161456"/>
             <a:ext cx="2276952" cy="228599"/>
           </a:xfrm>
           <a:prstGeom prst="rect">
@@ -30543,7 +30543,7 @@
         </p:nvSpPr>
         <p:spPr>
           <a:xfrm>
-            <a:off x="3024784" y="5621119"/>
+            <a:off x="3024784" y="5161456"/>
             <a:ext cx="2276952" cy="228599"/>
           </a:xfrm>
           <a:prstGeom prst="rect">
@@ -30581,7 +30581,7 @@
         </p:nvSpPr>
         <p:spPr>
           <a:xfrm>
-            <a:off x="5318049" y="5621119"/>
+            <a:off x="5318049" y="5161456"/>
             <a:ext cx="2276952" cy="228599"/>
           </a:xfrm>
           <a:prstGeom prst="rect">
@@ -30619,7 +30619,7 @@
         </p:nvSpPr>
         <p:spPr>
           <a:xfrm>
-            <a:off x="7611314" y="5621119"/>
+            <a:off x="7611314" y="5161456"/>
             <a:ext cx="2276952" cy="228599"/>
           </a:xfrm>
           <a:prstGeom prst="rect">
@@ -30657,7 +30657,7 @@
         </p:nvSpPr>
         <p:spPr>
           <a:xfrm>
-            <a:off x="9904580" y="5621119"/>
+            <a:off x="9904580" y="5161456"/>
             <a:ext cx="2276952" cy="228599"/>
           </a:xfrm>
           <a:prstGeom prst="rect">
@@ -31857,7 +31857,7 @@
               <a:t>04</a:t>
             </a:r>
             <a:r>
-              <a:rPr sz="900" b="1" i="0" spc="203">
+              <a:rPr sz="1050" b="1" i="0" spc="203">
                 <a:solidFill>
                   <a:srgbClr val="5F7E97"/>
                 </a:solidFill>
@@ -31876,7 +31876,7 @@
         </p:nvSpPr>
         <p:spPr>
           <a:xfrm>
-            <a:off x="792478" y="579119"/>
+            <a:off x="792478" y="563879"/>
             <a:ext cx="9870923" cy="228599"/>
           </a:xfrm>
           <a:prstGeom prst="rect">
@@ -31890,7 +31890,7 @@
           <a:p>
             <a:pPr algn="l">
               <a:lnSpc>
-                <a:spcPts val="7400"/>
+                <a:spcPts val="8030"/>
               </a:lnSpc>
               <a:buNone/>
             </a:pPr>
@@ -31914,7 +31914,7 @@
         </p:nvSpPr>
         <p:spPr>
           <a:xfrm>
-            <a:off x="792478" y="1625513"/>
+            <a:off x="792478" y="1706060"/>
             <a:ext cx="9171409" cy="228599"/>
           </a:xfrm>
           <a:prstGeom prst="rect">
@@ -31966,12 +31966,12 @@
           <a:p>
             <a:pPr algn="r">
               <a:lnSpc>
-                <a:spcPts val="1380"/>
+                <a:spcPts val="1730"/>
               </a:lnSpc>
               <a:buNone/>
             </a:pPr>
             <a:r>
-              <a:rPr sz="850" b="1" i="0" spc="109">
+              <a:rPr sz="1050" b="1" i="0" spc="109">
                 <a:solidFill>
                   <a:srgbClr val="8FA9BC"/>
                 </a:solidFill>
@@ -32004,12 +32004,12 @@
           <a:p>
             <a:pPr algn="r">
               <a:lnSpc>
-                <a:spcPts val="1660"/>
+                <a:spcPts val="1730"/>
               </a:lnSpc>
               <a:buNone/>
             </a:pPr>
             <a:r>
-              <a:rPr sz="1000" b="1" i="0" spc="156">
+              <a:rPr sz="1050" b="1" i="0" spc="156">
                 <a:solidFill>
                   <a:srgbClr val="8FA9BC"/>
                 </a:solidFill>
@@ -32036,8 +32036,8 @@
         </p:blipFill>
         <p:spPr>
           <a:xfrm>
-            <a:off x="792478" y="2216970"/>
-            <a:ext cx="792478" cy="792478"/>
+            <a:off x="792478" y="2834300"/>
+            <a:ext cx="1188717" cy="1188717"/>
           </a:xfrm>
           <a:prstGeom prst="rect">
             <a:avLst/>
@@ -32052,8 +32052,8 @@
         </p:nvSpPr>
         <p:spPr>
           <a:xfrm>
-            <a:off x="1722116" y="2277929"/>
-            <a:ext cx="2487162" cy="228599"/>
+            <a:off x="2148835" y="2971459"/>
+            <a:ext cx="2300625" cy="228599"/>
           </a:xfrm>
           <a:prstGeom prst="rect">
             <a:avLst/>
@@ -32066,12 +32066,12 @@
           <a:p>
             <a:pPr algn="l">
               <a:lnSpc>
-                <a:spcPts val="3210"/>
+                <a:spcPts val="3370"/>
               </a:lnSpc>
               <a:buNone/>
             </a:pPr>
             <a:r>
-              <a:rPr sz="1950" b="1" i="0">
+              <a:rPr sz="2050" b="1" i="0">
                 <a:solidFill>
                   <a:srgbClr val="4595C2"/>
                 </a:solidFill>
@@ -32090,8 +32090,8 @@
         </p:nvSpPr>
         <p:spPr>
           <a:xfrm>
-            <a:off x="1722116" y="2552249"/>
-            <a:ext cx="2487162" cy="228599"/>
+            <a:off x="2148835" y="3306739"/>
+            <a:ext cx="2300625" cy="228599"/>
           </a:xfrm>
           <a:prstGeom prst="rect">
             <a:avLst/>
@@ -32104,12 +32104,12 @@
           <a:p>
             <a:pPr algn="l">
               <a:lnSpc>
-                <a:spcPts val="1920"/>
+                <a:spcPts val="2080"/>
               </a:lnSpc>
               <a:buNone/>
             </a:pPr>
             <a:r>
-              <a:rPr sz="1150" b="1" i="0" spc="109">
+              <a:rPr sz="1250" b="1" i="0" spc="125">
                 <a:solidFill>
                   <a:srgbClr val="4595C2"/>
                 </a:solidFill>
@@ -32128,8 +32128,8 @@
         </p:nvSpPr>
         <p:spPr>
           <a:xfrm>
-            <a:off x="792478" y="3177087"/>
-            <a:ext cx="3419847" cy="228599"/>
+            <a:off x="2148835" y="3596298"/>
+            <a:ext cx="2300625" cy="228599"/>
           </a:xfrm>
           <a:prstGeom prst="rect">
             <a:avLst/>
@@ -32142,14 +32142,14 @@
           <a:p>
             <a:pPr algn="l">
               <a:lnSpc>
-                <a:spcPts val="2110"/>
+                <a:spcPts val="2039"/>
               </a:lnSpc>
               <a:buNone/>
             </a:pPr>
             <a:r>
-              <a:rPr sz="1300" b="1" i="0">
+              <a:rPr sz="1250" b="1" i="0">
                 <a:solidFill>
-                  <a:srgbClr val="33506B"/>
+                  <a:srgbClr val="5F7E97"/>
                 </a:solidFill>
                 <a:latin typeface="Poppins"/>
               </a:rPr>
@@ -32174,8 +32174,8 @@
         </p:blipFill>
         <p:spPr>
           <a:xfrm>
-            <a:off x="792478" y="3530797"/>
-            <a:ext cx="227837" cy="227837"/>
+            <a:off x="792478" y="4744392"/>
+            <a:ext cx="257555" cy="257555"/>
           </a:xfrm>
           <a:prstGeom prst="rect">
             <a:avLst/>
@@ -32190,8 +32190,8 @@
         </p:nvSpPr>
         <p:spPr>
           <a:xfrm>
-            <a:off x="1187498" y="3497126"/>
-            <a:ext cx="3016927" cy="228599"/>
+            <a:off x="1236875" y="4708815"/>
+            <a:ext cx="2966562" cy="228599"/>
           </a:xfrm>
           <a:prstGeom prst="rect">
             <a:avLst/>
@@ -32204,14 +32204,14 @@
           <a:p>
             <a:pPr algn="l">
               <a:lnSpc>
-                <a:spcPts val="2030"/>
+                <a:spcPts val="2240"/>
               </a:lnSpc>
               <a:buNone/>
             </a:pPr>
             <a:r>
-              <a:rPr sz="1200" b="0" i="0">
+              <a:rPr sz="1350" b="0" i="0">
                 <a:solidFill>
-                  <a:srgbClr val="5F7E97"/>
+                  <a:srgbClr val="33506B"/>
                 </a:solidFill>
                 <a:latin typeface="Poppins"/>
               </a:rPr>
@@ -32236,8 +32236,8 @@
         </p:blipFill>
         <p:spPr>
           <a:xfrm>
-            <a:off x="4373869" y="2216970"/>
-            <a:ext cx="792478" cy="792478"/>
+            <a:off x="4373869" y="2834300"/>
+            <a:ext cx="1188717" cy="1188717"/>
           </a:xfrm>
           <a:prstGeom prst="rect">
             <a:avLst/>
@@ -32252,8 +32252,8 @@
         </p:nvSpPr>
         <p:spPr>
           <a:xfrm>
-            <a:off x="5303507" y="2277929"/>
-            <a:ext cx="2487162" cy="228599"/>
+            <a:off x="5730226" y="2971459"/>
+            <a:ext cx="2300625" cy="228599"/>
           </a:xfrm>
           <a:prstGeom prst="rect">
             <a:avLst/>
@@ -32266,12 +32266,12 @@
           <a:p>
             <a:pPr algn="l">
               <a:lnSpc>
-                <a:spcPts val="3210"/>
+                <a:spcPts val="3370"/>
               </a:lnSpc>
               <a:buNone/>
             </a:pPr>
             <a:r>
-              <a:rPr sz="1950" b="1" i="0">
+              <a:rPr sz="2050" b="1" i="0">
                 <a:solidFill>
                   <a:srgbClr val="4595C2"/>
                 </a:solidFill>
@@ -32290,8 +32290,8 @@
         </p:nvSpPr>
         <p:spPr>
           <a:xfrm>
-            <a:off x="5303507" y="2552249"/>
-            <a:ext cx="2487162" cy="228599"/>
+            <a:off x="5730226" y="3306739"/>
+            <a:ext cx="2300625" cy="228599"/>
           </a:xfrm>
           <a:prstGeom prst="rect">
             <a:avLst/>
@@ -32304,12 +32304,12 @@
           <a:p>
             <a:pPr algn="l">
               <a:lnSpc>
-                <a:spcPts val="1920"/>
+                <a:spcPts val="2080"/>
               </a:lnSpc>
               <a:buNone/>
             </a:pPr>
             <a:r>
-              <a:rPr sz="1150" b="1" i="0" spc="109">
+              <a:rPr sz="1250" b="1" i="0" spc="125">
                 <a:solidFill>
                   <a:srgbClr val="4595C2"/>
                 </a:solidFill>
@@ -32328,8 +32328,8 @@
         </p:nvSpPr>
         <p:spPr>
           <a:xfrm>
-            <a:off x="4373869" y="3177087"/>
-            <a:ext cx="3419847" cy="228599"/>
+            <a:off x="5730226" y="3596298"/>
+            <a:ext cx="2300625" cy="228599"/>
           </a:xfrm>
           <a:prstGeom prst="rect">
             <a:avLst/>
@@ -32342,14 +32342,14 @@
           <a:p>
             <a:pPr algn="l">
               <a:lnSpc>
-                <a:spcPts val="2110"/>
+                <a:spcPts val="2039"/>
               </a:lnSpc>
               <a:buNone/>
             </a:pPr>
             <a:r>
-              <a:rPr sz="1300" b="1" i="0">
+              <a:rPr sz="1250" b="1" i="0">
                 <a:solidFill>
-                  <a:srgbClr val="33506B"/>
+                  <a:srgbClr val="5F7E97"/>
                 </a:solidFill>
                 <a:latin typeface="Poppins"/>
               </a:rPr>
@@ -32374,8 +32374,8 @@
         </p:blipFill>
         <p:spPr>
           <a:xfrm>
-            <a:off x="4373869" y="3530797"/>
-            <a:ext cx="227837" cy="227837"/>
+            <a:off x="4373869" y="4744392"/>
+            <a:ext cx="257555" cy="257555"/>
           </a:xfrm>
           <a:prstGeom prst="rect">
             <a:avLst/>
@@ -32390,8 +32390,8 @@
         </p:nvSpPr>
         <p:spPr>
           <a:xfrm>
-            <a:off x="4768889" y="3497126"/>
-            <a:ext cx="3016927" cy="228599"/>
+            <a:off x="4818266" y="4708815"/>
+            <a:ext cx="2966562" cy="228599"/>
           </a:xfrm>
           <a:prstGeom prst="rect">
             <a:avLst/>
@@ -32404,14 +32404,14 @@
           <a:p>
             <a:pPr algn="l">
               <a:lnSpc>
-                <a:spcPts val="2030"/>
+                <a:spcPts val="2240"/>
               </a:lnSpc>
               <a:buNone/>
             </a:pPr>
             <a:r>
-              <a:rPr sz="1200" b="0" i="0">
+              <a:rPr sz="1350" b="0" i="0">
                 <a:solidFill>
-                  <a:srgbClr val="5F7E97"/>
+                  <a:srgbClr val="33506B"/>
                 </a:solidFill>
                 <a:latin typeface="Poppins"/>
               </a:rPr>
@@ -32436,8 +32436,8 @@
         </p:blipFill>
         <p:spPr>
           <a:xfrm>
-            <a:off x="7955260" y="2216970"/>
-            <a:ext cx="792478" cy="792478"/>
+            <a:off x="7955260" y="2834300"/>
+            <a:ext cx="1188717" cy="1188717"/>
           </a:xfrm>
           <a:prstGeom prst="rect">
             <a:avLst/>
@@ -32452,8 +32452,8 @@
         </p:nvSpPr>
         <p:spPr>
           <a:xfrm>
-            <a:off x="8884898" y="2277929"/>
-            <a:ext cx="2487162" cy="228599"/>
+            <a:off x="9311617" y="2971459"/>
+            <a:ext cx="2300625" cy="228599"/>
           </a:xfrm>
           <a:prstGeom prst="rect">
             <a:avLst/>
@@ -32466,12 +32466,12 @@
           <a:p>
             <a:pPr algn="l">
               <a:lnSpc>
-                <a:spcPts val="3210"/>
+                <a:spcPts val="3370"/>
               </a:lnSpc>
               <a:buNone/>
             </a:pPr>
             <a:r>
-              <a:rPr sz="1950" b="1" i="0">
+              <a:rPr sz="2050" b="1" i="0">
                 <a:solidFill>
                   <a:srgbClr val="4595C2"/>
                 </a:solidFill>
@@ -32490,8 +32490,8 @@
         </p:nvSpPr>
         <p:spPr>
           <a:xfrm>
-            <a:off x="8884898" y="2552249"/>
-            <a:ext cx="2487162" cy="228599"/>
+            <a:off x="9311617" y="3306739"/>
+            <a:ext cx="2300625" cy="228599"/>
           </a:xfrm>
           <a:prstGeom prst="rect">
             <a:avLst/>
@@ -32504,12 +32504,12 @@
           <a:p>
             <a:pPr algn="l">
               <a:lnSpc>
-                <a:spcPts val="1920"/>
+                <a:spcPts val="2080"/>
               </a:lnSpc>
               <a:buNone/>
             </a:pPr>
             <a:r>
-              <a:rPr sz="1150" b="1" i="0" spc="109">
+              <a:rPr sz="1250" b="1" i="0" spc="125">
                 <a:solidFill>
                   <a:srgbClr val="4595C2"/>
                 </a:solidFill>
@@ -32528,8 +32528,8 @@
         </p:nvSpPr>
         <p:spPr>
           <a:xfrm>
-            <a:off x="7955260" y="3177087"/>
-            <a:ext cx="3419847" cy="228599"/>
+            <a:off x="9311617" y="3596298"/>
+            <a:ext cx="2300625" cy="228599"/>
           </a:xfrm>
           <a:prstGeom prst="rect">
             <a:avLst/>
@@ -32542,14 +32542,14 @@
           <a:p>
             <a:pPr algn="l">
               <a:lnSpc>
-                <a:spcPts val="2110"/>
+                <a:spcPts val="2039"/>
               </a:lnSpc>
               <a:buNone/>
             </a:pPr>
             <a:r>
-              <a:rPr sz="1300" b="1" i="0">
+              <a:rPr sz="1250" b="1" i="0">
                 <a:solidFill>
-                  <a:srgbClr val="33506B"/>
+                  <a:srgbClr val="5F7E97"/>
                 </a:solidFill>
                 <a:latin typeface="Poppins"/>
               </a:rPr>
@@ -32574,8 +32574,8 @@
         </p:blipFill>
         <p:spPr>
           <a:xfrm>
-            <a:off x="7955260" y="3530797"/>
-            <a:ext cx="227837" cy="227837"/>
+            <a:off x="7955260" y="4744392"/>
+            <a:ext cx="257555" cy="257555"/>
           </a:xfrm>
           <a:prstGeom prst="rect">
             <a:avLst/>
@@ -32590,8 +32590,8 @@
         </p:nvSpPr>
         <p:spPr>
           <a:xfrm>
-            <a:off x="8350280" y="3497126"/>
-            <a:ext cx="3016927" cy="228599"/>
+            <a:off x="8399657" y="4708815"/>
+            <a:ext cx="2966562" cy="228599"/>
           </a:xfrm>
           <a:prstGeom prst="rect">
             <a:avLst/>
@@ -32604,14 +32604,14 @@
           <a:p>
             <a:pPr algn="l">
               <a:lnSpc>
-                <a:spcPts val="2030"/>
+                <a:spcPts val="2240"/>
               </a:lnSpc>
               <a:buNone/>
             </a:pPr>
             <a:r>
-              <a:rPr sz="1200" b="0" i="0">
+              <a:rPr sz="1350" b="0" i="0">
                 <a:solidFill>
-                  <a:srgbClr val="5F7E97"/>
+                  <a:srgbClr val="33506B"/>
                 </a:solidFill>
                 <a:latin typeface="Poppins"/>
               </a:rPr>
@@ -33744,7 +33744,7 @@
               <a:t>05</a:t>
             </a:r>
             <a:r>
-              <a:rPr sz="900" b="1" i="0" spc="203">
+              <a:rPr sz="1050" b="1" i="0" spc="203">
                 <a:solidFill>
                   <a:srgbClr val="5F7E97"/>
                 </a:solidFill>
@@ -33763,7 +33763,7 @@
         </p:nvSpPr>
         <p:spPr>
           <a:xfrm>
-            <a:off x="792478" y="579119"/>
+            <a:off x="792478" y="563879"/>
             <a:ext cx="9870923" cy="228599"/>
           </a:xfrm>
           <a:prstGeom prst="rect">
@@ -33777,7 +33777,7 @@
           <a:p>
             <a:pPr algn="l">
               <a:lnSpc>
-                <a:spcPts val="7400"/>
+                <a:spcPts val="8030"/>
               </a:lnSpc>
               <a:buNone/>
             </a:pPr>
@@ -33801,7 +33801,7 @@
         </p:nvSpPr>
         <p:spPr>
           <a:xfrm>
-            <a:off x="792478" y="1625513"/>
+            <a:off x="792478" y="1706060"/>
             <a:ext cx="9171409" cy="228599"/>
           </a:xfrm>
           <a:prstGeom prst="rect">
@@ -33853,12 +33853,12 @@
           <a:p>
             <a:pPr algn="r">
               <a:lnSpc>
-                <a:spcPts val="1380"/>
+                <a:spcPts val="1730"/>
               </a:lnSpc>
               <a:buNone/>
             </a:pPr>
             <a:r>
-              <a:rPr sz="850" b="1" i="0" spc="109">
+              <a:rPr sz="1050" b="1" i="0" spc="109">
                 <a:solidFill>
                   <a:srgbClr val="8FA9BC"/>
                 </a:solidFill>
@@ -33891,12 +33891,12 @@
           <a:p>
             <a:pPr algn="r">
               <a:lnSpc>
-                <a:spcPts val="1660"/>
+                <a:spcPts val="1730"/>
               </a:lnSpc>
               <a:buNone/>
             </a:pPr>
             <a:r>
-              <a:rPr sz="1000" b="1" i="0" spc="156">
+              <a:rPr sz="1050" b="1" i="0" spc="156">
                 <a:solidFill>
                   <a:srgbClr val="8FA9BC"/>
                 </a:solidFill>
@@ -33923,7 +33923,7 @@
         </p:blipFill>
         <p:spPr>
           <a:xfrm>
-            <a:off x="792478" y="2195397"/>
+            <a:off x="792478" y="2325381"/>
             <a:ext cx="247649" cy="247649"/>
           </a:xfrm>
           <a:prstGeom prst="rect">
@@ -33939,7 +33939,7 @@
         </p:nvSpPr>
         <p:spPr>
           <a:xfrm>
-            <a:off x="1212187" y="2156010"/>
+            <a:off x="1212187" y="2285994"/>
             <a:ext cx="4235326" cy="228599"/>
           </a:xfrm>
           <a:prstGeom prst="rect">
@@ -33985,7 +33985,7 @@
         </p:blipFill>
         <p:spPr>
           <a:xfrm>
-            <a:off x="792478" y="3268246"/>
+            <a:off x="792478" y="3354903"/>
             <a:ext cx="247649" cy="247649"/>
           </a:xfrm>
           <a:prstGeom prst="rect">
@@ -34001,7 +34001,7 @@
         </p:nvSpPr>
         <p:spPr>
           <a:xfrm>
-            <a:off x="1212187" y="3228860"/>
+            <a:off x="1212187" y="3315516"/>
             <a:ext cx="4235326" cy="228599"/>
           </a:xfrm>
           <a:prstGeom prst="rect">
@@ -34047,7 +34047,7 @@
         </p:blipFill>
         <p:spPr>
           <a:xfrm>
-            <a:off x="792478" y="4625609"/>
+            <a:off x="792478" y="4668937"/>
             <a:ext cx="247649" cy="247649"/>
           </a:xfrm>
           <a:prstGeom prst="rect">
@@ -34063,7 +34063,7 @@
         </p:nvSpPr>
         <p:spPr>
           <a:xfrm>
-            <a:off x="1212187" y="4586222"/>
+            <a:off x="1212187" y="4629551"/>
             <a:ext cx="4235326" cy="228599"/>
           </a:xfrm>
           <a:prstGeom prst="rect">
@@ -34171,7 +34171,7 @@
         </p:blipFill>
         <p:spPr>
           <a:xfrm>
-            <a:off x="6126465" y="2195397"/>
+            <a:off x="6126465" y="2325381"/>
             <a:ext cx="247649" cy="247649"/>
           </a:xfrm>
           <a:prstGeom prst="rect">
@@ -34187,7 +34187,7 @@
         </p:nvSpPr>
         <p:spPr>
           <a:xfrm>
-            <a:off x="6546173" y="2156010"/>
+            <a:off x="6546173" y="2285994"/>
             <a:ext cx="4390773" cy="228599"/>
           </a:xfrm>
           <a:prstGeom prst="rect">
@@ -34233,7 +34233,7 @@
         </p:blipFill>
         <p:spPr>
           <a:xfrm>
-            <a:off x="6126465" y="3946928"/>
+            <a:off x="6126465" y="4011920"/>
             <a:ext cx="247649" cy="247649"/>
           </a:xfrm>
           <a:prstGeom prst="rect">
@@ -34249,7 +34249,7 @@
         </p:nvSpPr>
         <p:spPr>
           <a:xfrm>
-            <a:off x="6546173" y="3907541"/>
+            <a:off x="6546173" y="3972533"/>
             <a:ext cx="4390773" cy="228599"/>
           </a:xfrm>
           <a:prstGeom prst="rect">
@@ -35266,7 +35266,7 @@
               <a:t>06</a:t>
             </a:r>
             <a:r>
-              <a:rPr sz="900" b="1" i="0" spc="203">
+              <a:rPr sz="1050" b="1" i="0" spc="203">
                 <a:solidFill>
                   <a:srgbClr val="5F7E97"/>
                 </a:solidFill>
@@ -35285,7 +35285,7 @@
         </p:nvSpPr>
         <p:spPr>
           <a:xfrm>
-            <a:off x="792478" y="579119"/>
+            <a:off x="792478" y="563879"/>
             <a:ext cx="9870923" cy="228599"/>
           </a:xfrm>
           <a:prstGeom prst="rect">
@@ -35299,7 +35299,7 @@
           <a:p>
             <a:pPr algn="l">
               <a:lnSpc>
-                <a:spcPts val="7400"/>
+                <a:spcPts val="8030"/>
               </a:lnSpc>
               <a:buNone/>
             </a:pPr>
@@ -35323,7 +35323,7 @@
         </p:nvSpPr>
         <p:spPr>
           <a:xfrm>
-            <a:off x="792478" y="1625513"/>
+            <a:off x="792478" y="1706060"/>
             <a:ext cx="9171409" cy="228599"/>
           </a:xfrm>
           <a:prstGeom prst="rect">
@@ -35375,12 +35375,12 @@
           <a:p>
             <a:pPr algn="r">
               <a:lnSpc>
-                <a:spcPts val="1380"/>
+                <a:spcPts val="1730"/>
               </a:lnSpc>
               <a:buNone/>
             </a:pPr>
             <a:r>
-              <a:rPr sz="850" b="1" i="0" spc="109">
+              <a:rPr sz="1050" b="1" i="0" spc="109">
                 <a:solidFill>
                   <a:srgbClr val="8FA9BC"/>
                 </a:solidFill>
@@ -35413,12 +35413,12 @@
           <a:p>
             <a:pPr algn="r">
               <a:lnSpc>
-                <a:spcPts val="1660"/>
+                <a:spcPts val="1730"/>
               </a:lnSpc>
               <a:buNone/>
             </a:pPr>
             <a:r>
-              <a:rPr sz="1000" b="1" i="0" spc="156">
+              <a:rPr sz="1050" b="1" i="0" spc="156">
                 <a:solidFill>
                   <a:srgbClr val="8FA9BC"/>
                 </a:solidFill>
@@ -35437,7 +35437,7 @@
         </p:nvSpPr>
         <p:spPr>
           <a:xfrm>
-            <a:off x="792478" y="2156010"/>
+            <a:off x="792478" y="2357141"/>
             <a:ext cx="5907009" cy="228599"/>
           </a:xfrm>
           <a:prstGeom prst="rect">
@@ -35451,12 +35451,12 @@
           <a:p>
             <a:pPr algn="l">
               <a:lnSpc>
-                <a:spcPts val="1660"/>
+                <a:spcPts val="1730"/>
               </a:lnSpc>
               <a:buNone/>
             </a:pPr>
             <a:r>
-              <a:rPr sz="1000" b="1" i="0" spc="203">
+              <a:rPr sz="1050" b="1" i="0" spc="203">
                 <a:solidFill>
                   <a:srgbClr val="4595C2"/>
                 </a:solidFill>
@@ -35483,7 +35483,7 @@
         </p:blipFill>
         <p:spPr>
           <a:xfrm>
-            <a:off x="792478" y="2453205"/>
+            <a:off x="792478" y="2654336"/>
             <a:ext cx="227837" cy="227837"/>
           </a:xfrm>
           <a:prstGeom prst="rect">
@@ -35499,7 +35499,7 @@
         </p:nvSpPr>
         <p:spPr>
           <a:xfrm>
-            <a:off x="1187498" y="2415089"/>
+            <a:off x="1187498" y="2616221"/>
             <a:ext cx="1307004" cy="228599"/>
           </a:xfrm>
           <a:prstGeom prst="rect">
@@ -35545,7 +35545,7 @@
         </p:blipFill>
         <p:spPr>
           <a:xfrm>
-            <a:off x="2606033" y="2453205"/>
+            <a:off x="2606033" y="2654336"/>
             <a:ext cx="227837" cy="227837"/>
           </a:xfrm>
           <a:prstGeom prst="rect">
@@ -35561,7 +35561,7 @@
         </p:nvSpPr>
         <p:spPr>
           <a:xfrm>
-            <a:off x="3001053" y="2415089"/>
+            <a:off x="3001053" y="2616221"/>
             <a:ext cx="1307004" cy="228599"/>
           </a:xfrm>
           <a:prstGeom prst="rect">
@@ -35607,7 +35607,7 @@
         </p:blipFill>
         <p:spPr>
           <a:xfrm>
-            <a:off x="4419589" y="2453205"/>
+            <a:off x="4419589" y="2654336"/>
             <a:ext cx="227837" cy="227837"/>
           </a:xfrm>
           <a:prstGeom prst="rect">
@@ -35623,7 +35623,7 @@
         </p:nvSpPr>
         <p:spPr>
           <a:xfrm>
-            <a:off x="4814609" y="2415089"/>
+            <a:off x="4814609" y="2616221"/>
             <a:ext cx="1307004" cy="228599"/>
           </a:xfrm>
           <a:prstGeom prst="rect">
@@ -35669,7 +35669,7 @@
         </p:blipFill>
         <p:spPr>
           <a:xfrm>
-            <a:off x="6233144" y="2453205"/>
+            <a:off x="6233144" y="2654336"/>
             <a:ext cx="227837" cy="227837"/>
           </a:xfrm>
           <a:prstGeom prst="rect">
@@ -35685,7 +35685,7 @@
         </p:nvSpPr>
         <p:spPr>
           <a:xfrm>
-            <a:off x="6628164" y="2415089"/>
+            <a:off x="6628164" y="2616221"/>
             <a:ext cx="1307004" cy="228599"/>
           </a:xfrm>
           <a:prstGeom prst="rect">
@@ -35731,7 +35731,7 @@
         </p:blipFill>
         <p:spPr>
           <a:xfrm>
-            <a:off x="8046700" y="2453205"/>
+            <a:off x="8046700" y="2654336"/>
             <a:ext cx="227837" cy="227837"/>
           </a:xfrm>
           <a:prstGeom prst="rect">
@@ -35747,7 +35747,7 @@
         </p:nvSpPr>
         <p:spPr>
           <a:xfrm>
-            <a:off x="8441720" y="2415089"/>
+            <a:off x="8441720" y="2616221"/>
             <a:ext cx="1307004" cy="228599"/>
           </a:xfrm>
           <a:prstGeom prst="rect">
@@ -35785,7 +35785,7 @@
         </p:nvSpPr>
         <p:spPr>
           <a:xfrm>
-            <a:off x="792478" y="2963728"/>
+            <a:off x="792478" y="3164859"/>
             <a:ext cx="5907009" cy="228599"/>
           </a:xfrm>
           <a:prstGeom prst="rect">
@@ -35799,12 +35799,12 @@
           <a:p>
             <a:pPr algn="l">
               <a:lnSpc>
-                <a:spcPts val="1660"/>
+                <a:spcPts val="1730"/>
               </a:lnSpc>
               <a:buNone/>
             </a:pPr>
             <a:r>
-              <a:rPr sz="1000" b="1" i="0" spc="203">
+              <a:rPr sz="1050" b="1" i="0" spc="203">
                 <a:solidFill>
                   <a:srgbClr val="4595C2"/>
                 </a:solidFill>
@@ -35831,7 +35831,7 @@
         </p:blipFill>
         <p:spPr>
           <a:xfrm>
-            <a:off x="792478" y="3262829"/>
+            <a:off x="792478" y="3463961"/>
             <a:ext cx="257555" cy="257555"/>
           </a:xfrm>
           <a:prstGeom prst="rect">
@@ -35847,7 +35847,7 @@
         </p:nvSpPr>
         <p:spPr>
           <a:xfrm>
-            <a:off x="1212187" y="3222807"/>
+            <a:off x="1212187" y="3423939"/>
             <a:ext cx="8898754" cy="228599"/>
           </a:xfrm>
           <a:prstGeom prst="rect">
@@ -35893,7 +35893,7 @@
         </p:blipFill>
         <p:spPr>
           <a:xfrm>
-            <a:off x="792478" y="3693393"/>
+            <a:off x="792478" y="4414818"/>
             <a:ext cx="257555" cy="257555"/>
           </a:xfrm>
           <a:prstGeom prst="rect">
@@ -35909,7 +35909,7 @@
         </p:nvSpPr>
         <p:spPr>
           <a:xfrm>
-            <a:off x="1212187" y="3653371"/>
+            <a:off x="1212187" y="4374795"/>
             <a:ext cx="8898754" cy="228599"/>
           </a:xfrm>
           <a:prstGeom prst="rect">
@@ -35947,7 +35947,7 @@
         </p:nvSpPr>
         <p:spPr>
           <a:xfrm>
-            <a:off x="899158" y="4282054"/>
+            <a:off x="899158" y="5523771"/>
             <a:ext cx="1931978" cy="228599"/>
           </a:xfrm>
           <a:prstGeom prst="rect">
@@ -35985,7 +35985,7 @@
         </p:nvSpPr>
         <p:spPr>
           <a:xfrm>
-            <a:off x="2854214" y="4282054"/>
+            <a:off x="2854214" y="5523771"/>
             <a:ext cx="1931978" cy="228599"/>
           </a:xfrm>
           <a:prstGeom prst="rect">
@@ -36023,7 +36023,7 @@
         </p:nvSpPr>
         <p:spPr>
           <a:xfrm>
-            <a:off x="4809271" y="4282054"/>
+            <a:off x="4809271" y="5523771"/>
             <a:ext cx="1931978" cy="228599"/>
           </a:xfrm>
           <a:prstGeom prst="rect">
@@ -37153,7 +37153,7 @@
               <a:t>07</a:t>
             </a:r>
             <a:r>
-              <a:rPr sz="900" b="1" i="0" spc="203">
+              <a:rPr sz="1050" b="1" i="0" spc="203">
                 <a:solidFill>
                   <a:srgbClr val="5F7E97"/>
                 </a:solidFill>
@@ -37172,7 +37172,7 @@
         </p:nvSpPr>
         <p:spPr>
           <a:xfrm>
-            <a:off x="792478" y="579119"/>
+            <a:off x="792478" y="563879"/>
             <a:ext cx="9870923" cy="228599"/>
           </a:xfrm>
           <a:prstGeom prst="rect">
@@ -37186,7 +37186,7 @@
           <a:p>
             <a:pPr algn="l">
               <a:lnSpc>
-                <a:spcPts val="7400"/>
+                <a:spcPts val="8030"/>
               </a:lnSpc>
               <a:buNone/>
             </a:pPr>
@@ -37210,7 +37210,7 @@
         </p:nvSpPr>
         <p:spPr>
           <a:xfrm>
-            <a:off x="792478" y="1625513"/>
+            <a:off x="792478" y="1706060"/>
             <a:ext cx="9171409" cy="228599"/>
           </a:xfrm>
           <a:prstGeom prst="rect">
@@ -37262,12 +37262,12 @@
           <a:p>
             <a:pPr algn="r">
               <a:lnSpc>
-                <a:spcPts val="1380"/>
+                <a:spcPts val="1730"/>
               </a:lnSpc>
               <a:buNone/>
             </a:pPr>
             <a:r>
-              <a:rPr sz="850" b="1" i="0" spc="109">
+              <a:rPr sz="1050" b="1" i="0" spc="109">
                 <a:solidFill>
                   <a:srgbClr val="8FA9BC"/>
                 </a:solidFill>
@@ -37300,12 +37300,12 @@
           <a:p>
             <a:pPr algn="r">
               <a:lnSpc>
-                <a:spcPts val="1660"/>
+                <a:spcPts val="1730"/>
               </a:lnSpc>
               <a:buNone/>
             </a:pPr>
             <a:r>
-              <a:rPr sz="1000" b="1" i="0" spc="156">
+              <a:rPr sz="1050" b="1" i="0" spc="156">
                 <a:solidFill>
                   <a:srgbClr val="8FA9BC"/>
                 </a:solidFill>
@@ -37324,7 +37324,7 @@
         </p:nvSpPr>
         <p:spPr>
           <a:xfrm>
-            <a:off x="792478" y="2156010"/>
+            <a:off x="792478" y="2334189"/>
             <a:ext cx="5907009" cy="228599"/>
           </a:xfrm>
           <a:prstGeom prst="rect">
@@ -37338,12 +37338,12 @@
           <a:p>
             <a:pPr algn="l">
               <a:lnSpc>
-                <a:spcPts val="1660"/>
+                <a:spcPts val="1730"/>
               </a:lnSpc>
               <a:buNone/>
             </a:pPr>
             <a:r>
-              <a:rPr sz="1000" b="1" i="0" spc="203">
+              <a:rPr sz="1050" b="1" i="0" spc="203">
                 <a:solidFill>
                   <a:srgbClr val="4595C2"/>
                 </a:solidFill>
@@ -37370,7 +37370,7 @@
         </p:blipFill>
         <p:spPr>
           <a:xfrm>
-            <a:off x="792478" y="2454476"/>
+            <a:off x="792478" y="2632655"/>
             <a:ext cx="247649" cy="247649"/>
           </a:xfrm>
           <a:prstGeom prst="rect">
@@ -37386,7 +37386,7 @@
         </p:nvSpPr>
         <p:spPr>
           <a:xfrm>
-            <a:off x="1212187" y="2415089"/>
+            <a:off x="1212187" y="2593268"/>
             <a:ext cx="4546221" cy="228599"/>
           </a:xfrm>
           <a:prstGeom prst="rect">
@@ -37432,7 +37432,7 @@
         </p:blipFill>
         <p:spPr>
           <a:xfrm>
-            <a:off x="792478" y="3912365"/>
+            <a:off x="792478" y="4442988"/>
             <a:ext cx="247649" cy="247649"/>
           </a:xfrm>
           <a:prstGeom prst="rect">
@@ -37448,7 +37448,7 @@
         </p:nvSpPr>
         <p:spPr>
           <a:xfrm>
-            <a:off x="1212187" y="3872978"/>
+            <a:off x="1212187" y="4403602"/>
             <a:ext cx="4546221" cy="228599"/>
           </a:xfrm>
           <a:prstGeom prst="rect">
@@ -37486,7 +37486,7 @@
         </p:nvSpPr>
         <p:spPr>
           <a:xfrm>
-            <a:off x="6278864" y="2156010"/>
+            <a:off x="6278864" y="2334189"/>
             <a:ext cx="4352533" cy="228599"/>
           </a:xfrm>
           <a:prstGeom prst="rect">
@@ -37500,12 +37500,12 @@
           <a:p>
             <a:pPr algn="l">
               <a:lnSpc>
-                <a:spcPts val="1660"/>
+                <a:spcPts val="1730"/>
               </a:lnSpc>
               <a:buNone/>
             </a:pPr>
             <a:r>
-              <a:rPr sz="1000" b="1" i="0" spc="203">
+              <a:rPr sz="1050" b="1" i="0" spc="203">
                 <a:solidFill>
                   <a:srgbClr val="4595C2"/>
                 </a:solidFill>
@@ -37532,7 +37532,7 @@
         </p:blipFill>
         <p:spPr>
           <a:xfrm>
-            <a:off x="6278864" y="2454476"/>
+            <a:off x="6278864" y="2632655"/>
             <a:ext cx="247649" cy="247649"/>
           </a:xfrm>
           <a:prstGeom prst="rect">
@@ -37548,7 +37548,7 @@
         </p:nvSpPr>
         <p:spPr>
           <a:xfrm>
-            <a:off x="6698573" y="2415089"/>
+            <a:off x="6698573" y="2593268"/>
             <a:ext cx="4079878" cy="228599"/>
           </a:xfrm>
           <a:prstGeom prst="rect">
@@ -37594,7 +37594,7 @@
         </p:blipFill>
         <p:spPr>
           <a:xfrm>
-            <a:off x="6278864" y="3912365"/>
+            <a:off x="6278864" y="4442988"/>
             <a:ext cx="247649" cy="247649"/>
           </a:xfrm>
           <a:prstGeom prst="rect">
@@ -37610,7 +37610,7 @@
         </p:nvSpPr>
         <p:spPr>
           <a:xfrm>
-            <a:off x="6698573" y="3872978"/>
+            <a:off x="6698573" y="4403602"/>
             <a:ext cx="4079878" cy="228599"/>
           </a:xfrm>
           <a:prstGeom prst="rect">
@@ -37656,7 +37656,7 @@
         </p:blipFill>
         <p:spPr>
           <a:xfrm>
-            <a:off x="792478" y="4817941"/>
+            <a:off x="792478" y="5701009"/>
             <a:ext cx="267461" cy="267461"/>
           </a:xfrm>
           <a:prstGeom prst="rect">
@@ -37672,7 +37672,7 @@
         </p:nvSpPr>
         <p:spPr>
           <a:xfrm>
-            <a:off x="1212187" y="4777283"/>
+            <a:off x="1212187" y="5660351"/>
             <a:ext cx="9287373" cy="228599"/>
           </a:xfrm>
           <a:prstGeom prst="rect">
@@ -38537,7 +38537,7 @@
               <a:t>08</a:t>
             </a:r>
             <a:r>
-              <a:rPr sz="900" b="1" i="0" spc="203">
+              <a:rPr sz="1050" b="1" i="0" spc="203">
                 <a:solidFill>
                   <a:srgbClr val="5F7E97"/>
                 </a:solidFill>
@@ -38556,7 +38556,7 @@
         </p:nvSpPr>
         <p:spPr>
           <a:xfrm>
-            <a:off x="792478" y="579119"/>
+            <a:off x="792478" y="563879"/>
             <a:ext cx="9870923" cy="228599"/>
           </a:xfrm>
           <a:prstGeom prst="rect">
@@ -38570,7 +38570,7 @@
           <a:p>
             <a:pPr algn="l">
               <a:lnSpc>
-                <a:spcPts val="7400"/>
+                <a:spcPts val="8030"/>
               </a:lnSpc>
               <a:buNone/>
             </a:pPr>
@@ -38594,7 +38594,7 @@
         </p:nvSpPr>
         <p:spPr>
           <a:xfrm>
-            <a:off x="792478" y="1625513"/>
+            <a:off x="792478" y="1706060"/>
             <a:ext cx="9171409" cy="228599"/>
           </a:xfrm>
           <a:prstGeom prst="rect">
@@ -38646,12 +38646,12 @@
           <a:p>
             <a:pPr algn="r">
               <a:lnSpc>
-                <a:spcPts val="1380"/>
+                <a:spcPts val="1730"/>
               </a:lnSpc>
               <a:buNone/>
             </a:pPr>
             <a:r>
-              <a:rPr sz="850" b="1" i="0" spc="109">
+              <a:rPr sz="1050" b="1" i="0" spc="109">
                 <a:solidFill>
                   <a:srgbClr val="8FA9BC"/>
                 </a:solidFill>
@@ -38684,12 +38684,12 @@
           <a:p>
             <a:pPr algn="r">
               <a:lnSpc>
-                <a:spcPts val="1660"/>
+                <a:spcPts val="1730"/>
               </a:lnSpc>
               <a:buNone/>
             </a:pPr>
             <a:r>
-              <a:rPr sz="1000" b="1" i="0" spc="156">
+              <a:rPr sz="1050" b="1" i="0" spc="156">
                 <a:solidFill>
                   <a:srgbClr val="8FA9BC"/>
                 </a:solidFill>
@@ -38716,7 +38716,7 @@
         </p:blipFill>
         <p:spPr>
           <a:xfrm>
-            <a:off x="1798316" y="2308409"/>
+            <a:off x="1798316" y="2438394"/>
             <a:ext cx="3276592" cy="3276592"/>
           </a:xfrm>
           <a:prstGeom prst="rect">
@@ -38732,7 +38732,7 @@
         </p:nvSpPr>
         <p:spPr>
           <a:xfrm>
-            <a:off x="1798316" y="3359967"/>
+            <a:off x="1798316" y="3489951"/>
             <a:ext cx="3342124" cy="228599"/>
           </a:xfrm>
           <a:prstGeom prst="rect">
@@ -38770,7 +38770,7 @@
         </p:nvSpPr>
         <p:spPr>
           <a:xfrm>
-            <a:off x="1798316" y="3573326"/>
+            <a:off x="1798316" y="3703311"/>
             <a:ext cx="3342124" cy="228599"/>
           </a:xfrm>
           <a:prstGeom prst="rect">
@@ -38808,7 +38808,7 @@
         </p:nvSpPr>
         <p:spPr>
           <a:xfrm>
-            <a:off x="1798316" y="5005883"/>
+            <a:off x="1798316" y="5135867"/>
             <a:ext cx="3342124" cy="228599"/>
           </a:xfrm>
           <a:prstGeom prst="rect">
@@ -38822,12 +38822,12 @@
           <a:p>
             <a:pPr algn="ctr">
               <a:lnSpc>
-                <a:spcPts val="1660"/>
+                <a:spcPts val="1730"/>
               </a:lnSpc>
               <a:buNone/>
             </a:pPr>
             <a:r>
-              <a:rPr sz="1000" b="1" i="0" spc="234">
+              <a:rPr sz="1050" b="1" i="0" spc="234">
                 <a:solidFill>
                   <a:srgbClr val="5F7E97"/>
                 </a:solidFill>
@@ -38846,7 +38846,7 @@
         </p:nvSpPr>
         <p:spPr>
           <a:xfrm>
-            <a:off x="5669266" y="2125530"/>
+            <a:off x="5669266" y="2255514"/>
             <a:ext cx="4352533" cy="228599"/>
           </a:xfrm>
           <a:prstGeom prst="rect">
@@ -38884,7 +38884,7 @@
         </p:nvSpPr>
         <p:spPr>
           <a:xfrm>
-            <a:off x="5669266" y="2680455"/>
+            <a:off x="5669266" y="2810439"/>
             <a:ext cx="4235947" cy="228599"/>
           </a:xfrm>
           <a:prstGeom prst="rect">
@@ -38922,7 +38922,7 @@
         </p:nvSpPr>
         <p:spPr>
           <a:xfrm>
-            <a:off x="5669266" y="3267889"/>
+            <a:off x="5669266" y="3397873"/>
             <a:ext cx="4352533" cy="228599"/>
           </a:xfrm>
           <a:prstGeom prst="rect">
@@ -38960,7 +38960,7 @@
         </p:nvSpPr>
         <p:spPr>
           <a:xfrm>
-            <a:off x="5669266" y="3822814"/>
+            <a:off x="5669266" y="3952798"/>
             <a:ext cx="4235947" cy="228599"/>
           </a:xfrm>
           <a:prstGeom prst="rect">
@@ -39006,7 +39006,7 @@
         </p:blipFill>
         <p:spPr>
           <a:xfrm>
-            <a:off x="5669266" y="4203253"/>
+            <a:off x="5669266" y="4333237"/>
             <a:ext cx="247649" cy="247649"/>
           </a:xfrm>
           <a:prstGeom prst="rect">
@@ -39022,7 +39022,7 @@
         </p:nvSpPr>
         <p:spPr>
           <a:xfrm>
-            <a:off x="6088974" y="4181648"/>
+            <a:off x="6088974" y="4311632"/>
             <a:ext cx="3924430" cy="228599"/>
           </a:xfrm>
           <a:prstGeom prst="rect">
@@ -39068,7 +39068,7 @@
         </p:blipFill>
         <p:spPr>
           <a:xfrm>
-            <a:off x="5669266" y="4849283"/>
+            <a:off x="5669266" y="4979267"/>
             <a:ext cx="247649" cy="247649"/>
           </a:xfrm>
           <a:prstGeom prst="rect">
@@ -39084,7 +39084,7 @@
         </p:nvSpPr>
         <p:spPr>
           <a:xfrm>
-            <a:off x="6088974" y="4827678"/>
+            <a:off x="6088974" y="4957663"/>
             <a:ext cx="3924430" cy="228599"/>
           </a:xfrm>
           <a:prstGeom prst="rect">
@@ -39130,7 +39130,7 @@
         </p:blipFill>
         <p:spPr>
           <a:xfrm>
-            <a:off x="5669266" y="5246364"/>
+            <a:off x="5669266" y="5376349"/>
             <a:ext cx="247649" cy="247649"/>
           </a:xfrm>
           <a:prstGeom prst="rect">
@@ -39146,7 +39146,7 @@
         </p:nvSpPr>
         <p:spPr>
           <a:xfrm>
-            <a:off x="6088974" y="5224760"/>
+            <a:off x="6088974" y="5354744"/>
             <a:ext cx="3924430" cy="228599"/>
           </a:xfrm>
           <a:prstGeom prst="rect">
@@ -40117,7 +40117,7 @@
               <a:t>09</a:t>
             </a:r>
             <a:r>
-              <a:rPr sz="900" b="1" i="0" spc="203">
+              <a:rPr sz="1050" b="1" i="0" spc="203">
                 <a:solidFill>
                   <a:srgbClr val="5F7E97"/>
                 </a:solidFill>
@@ -40136,7 +40136,7 @@
         </p:nvSpPr>
         <p:spPr>
           <a:xfrm>
-            <a:off x="792478" y="579119"/>
+            <a:off x="792478" y="563879"/>
             <a:ext cx="9870923" cy="228599"/>
           </a:xfrm>
           <a:prstGeom prst="rect">
@@ -40150,12 +40150,12 @@
           <a:p>
             <a:pPr algn="l">
               <a:lnSpc>
-                <a:spcPts val="7400"/>
+                <a:spcPts val="5680"/>
               </a:lnSpc>
               <a:buNone/>
             </a:pPr>
             <a:r>
-              <a:rPr sz="5650" b="1" i="0">
+              <a:rPr sz="4000" b="1" i="0">
                 <a:solidFill>
                   <a:srgbClr val="4595C2"/>
                 </a:solidFill>
@@ -40174,7 +40174,7 @@
         </p:nvSpPr>
         <p:spPr>
           <a:xfrm>
-            <a:off x="792478" y="2565228"/>
+            <a:off x="792478" y="2128238"/>
             <a:ext cx="8161000" cy="228599"/>
           </a:xfrm>
           <a:prstGeom prst="rect">
@@ -40226,12 +40226,12 @@
           <a:p>
             <a:pPr algn="r">
               <a:lnSpc>
-                <a:spcPts val="1380"/>
+                <a:spcPts val="1730"/>
               </a:lnSpc>
               <a:buNone/>
             </a:pPr>
             <a:r>
-              <a:rPr sz="850" b="1" i="0" spc="109">
+              <a:rPr sz="1050" b="1" i="0" spc="109">
                 <a:solidFill>
                   <a:srgbClr val="8FA9BC"/>
                 </a:solidFill>
@@ -40264,12 +40264,12 @@
           <a:p>
             <a:pPr algn="r">
               <a:lnSpc>
-                <a:spcPts val="1660"/>
+                <a:spcPts val="1730"/>
               </a:lnSpc>
               <a:buNone/>
             </a:pPr>
             <a:r>
-              <a:rPr sz="1000" b="1" i="0" spc="156">
+              <a:rPr sz="1050" b="1" i="0" spc="156">
                 <a:solidFill>
                   <a:srgbClr val="8FA9BC"/>
                 </a:solidFill>
@@ -40296,7 +40296,7 @@
         </p:blipFill>
         <p:spPr>
           <a:xfrm>
-            <a:off x="792478" y="3135112"/>
+            <a:off x="792478" y="2698121"/>
             <a:ext cx="247649" cy="247649"/>
           </a:xfrm>
           <a:prstGeom prst="rect">
@@ -40312,7 +40312,7 @@
         </p:nvSpPr>
         <p:spPr>
           <a:xfrm>
-            <a:off x="1212187" y="3095725"/>
+            <a:off x="1212187" y="2658734"/>
             <a:ext cx="8898754" cy="228599"/>
           </a:xfrm>
           <a:prstGeom prst="rect">
@@ -40358,7 +40358,7 @@
         </p:blipFill>
         <p:spPr>
           <a:xfrm>
-            <a:off x="792478" y="3661649"/>
+            <a:off x="792478" y="3333906"/>
             <a:ext cx="247649" cy="247649"/>
           </a:xfrm>
           <a:prstGeom prst="rect">
@@ -40374,7 +40374,7 @@
         </p:nvSpPr>
         <p:spPr>
           <a:xfrm>
-            <a:off x="1212187" y="3622262"/>
+            <a:off x="1212187" y="3294519"/>
             <a:ext cx="8898754" cy="228599"/>
           </a:xfrm>
           <a:prstGeom prst="rect">
@@ -40420,7 +40420,7 @@
         </p:blipFill>
         <p:spPr>
           <a:xfrm>
-            <a:off x="792478" y="4188186"/>
+            <a:off x="792478" y="3969691"/>
             <a:ext cx="247649" cy="247649"/>
           </a:xfrm>
           <a:prstGeom prst="rect">
@@ -40436,7 +40436,7 @@
         </p:nvSpPr>
         <p:spPr>
           <a:xfrm>
-            <a:off x="1212187" y="4148799"/>
+            <a:off x="1212187" y="3930304"/>
             <a:ext cx="8898754" cy="228599"/>
           </a:xfrm>
           <a:prstGeom prst="rect">
@@ -40482,7 +40482,7 @@
         </p:blipFill>
         <p:spPr>
           <a:xfrm>
-            <a:off x="792478" y="4714723"/>
+            <a:off x="792478" y="4605475"/>
             <a:ext cx="247649" cy="247649"/>
           </a:xfrm>
           <a:prstGeom prst="rect">
@@ -40498,7 +40498,7 @@
         </p:nvSpPr>
         <p:spPr>
           <a:xfrm>
-            <a:off x="1212187" y="4675336"/>
+            <a:off x="1212187" y="4566089"/>
             <a:ext cx="8898754" cy="228599"/>
           </a:xfrm>
           <a:prstGeom prst="rect">
